--- a/docx/slide/L3_sql_injection.pptx
+++ b/docx/slide/L3_sql_injection.pptx
@@ -19,6 +19,7 @@
     <p:sldId id="267" r:id="rId18"/>
     <p:sldId id="268" r:id="rId19"/>
     <p:sldId id="269" r:id="rId20"/>
+    <p:sldId id="270" r:id="rId21"/>
   </p:sldIdLst>
   <p:sldSz cx="12191695" cy="6858000" type="screen4x3"/>
   <p:notesSz cx="6858000" cy="9144000"/>
@@ -3588,6 +3589,1039 @@
 </file>
 
 <file path=ppt/slides/slide10.xml><?xml version="1.0" encoding="utf-8"?>
+<p:sld xmlns:a="http://schemas.openxmlformats.org/drawingml/2006/main" xmlns:p="http://schemas.openxmlformats.org/presentationml/2006/main" xmlns:r="http://schemas.openxmlformats.org/officeDocument/2006/relationships">
+  <p:cSld>
+    <p:spTree>
+      <p:nvGrpSpPr>
+        <p:cNvPr id="1" name=""/>
+        <p:cNvGrpSpPr/>
+        <p:nvPr/>
+      </p:nvGrpSpPr>
+      <p:grpSpPr/>
+      <p:sp>
+        <p:nvSpPr>
+          <p:cNvPr id="2" name="Rectangle 1"/>
+          <p:cNvSpPr/>
+          <p:nvPr/>
+        </p:nvSpPr>
+        <p:spPr>
+          <a:xfrm>
+            <a:off x="0" y="0"/>
+            <a:ext cx="12191695" cy="777240"/>
+          </a:xfrm>
+          <a:prstGeom prst="rect">
+            <a:avLst/>
+          </a:prstGeom>
+          <a:solidFill>
+            <a:srgbClr val="0F2D52"/>
+          </a:solidFill>
+          <a:ln>
+            <a:noFill/>
+          </a:ln>
+        </p:spPr>
+        <p:style>
+          <a:lnRef idx="1">
+            <a:schemeClr val="accent1"/>
+          </a:lnRef>
+          <a:fillRef idx="3">
+            <a:schemeClr val="accent1"/>
+          </a:fillRef>
+          <a:effectRef idx="2">
+            <a:schemeClr val="accent1"/>
+          </a:effectRef>
+          <a:fontRef idx="minor">
+            <a:schemeClr val="lt1"/>
+          </a:fontRef>
+        </p:style>
+        <p:txBody>
+          <a:bodyPr rtlCol="0" anchor="ctr"/>
+          <a:lstStyle/>
+          <a:p>
+            <a:pPr algn="ctr"/>
+          </a:p>
+        </p:txBody>
+      </p:sp>
+      <p:sp>
+        <p:nvSpPr>
+          <p:cNvPr id="3" name="TextBox 2"/>
+          <p:cNvSpPr txBox="1"/>
+          <p:nvPr/>
+        </p:nvSpPr>
+        <p:spPr>
+          <a:xfrm>
+            <a:off x="457200" y="164592"/>
+            <a:ext cx="10972800" cy="502920"/>
+          </a:xfrm>
+          <a:prstGeom prst="rect">
+            <a:avLst/>
+          </a:prstGeom>
+          <a:noFill/>
+        </p:spPr>
+        <p:txBody>
+          <a:bodyPr wrap="square" lIns="45720" rIns="45720" tIns="18288" bIns="18288" anchor="ctr">
+            <a:spAutoFit/>
+          </a:bodyPr>
+          <a:lstStyle/>
+          <a:p>
+            <a:pPr algn="l"/>
+            <a:r>
+              <a:rPr sz="2400" b="1" i="0">
+                <a:solidFill>
+                  <a:srgbClr val="FFFFFF"/>
+                </a:solidFill>
+                <a:latin typeface="Calibri"/>
+              </a:rPr>
+              <a:t>Filtrare gli apici NON funziona</a:t>
+            </a:r>
+          </a:p>
+        </p:txBody>
+      </p:sp>
+      <p:sp>
+        <p:nvSpPr>
+          <p:cNvPr id="4" name="Rounded Rectangle 3"/>
+          <p:cNvSpPr/>
+          <p:nvPr/>
+        </p:nvSpPr>
+        <p:spPr>
+          <a:xfrm>
+            <a:off x="457200" y="1051560"/>
+            <a:ext cx="5486400" cy="640080"/>
+          </a:xfrm>
+          <a:prstGeom prst="roundRect">
+            <a:avLst>
+              <a:gd name="adj" fmla="val 8000"/>
+            </a:avLst>
+          </a:prstGeom>
+          <a:solidFill>
+            <a:srgbClr val="E63946"/>
+          </a:solidFill>
+          <a:ln>
+            <a:noFill/>
+          </a:ln>
+        </p:spPr>
+        <p:style>
+          <a:lnRef idx="1">
+            <a:schemeClr val="accent1"/>
+          </a:lnRef>
+          <a:fillRef idx="3">
+            <a:schemeClr val="accent1"/>
+          </a:fillRef>
+          <a:effectRef idx="2">
+            <a:schemeClr val="accent1"/>
+          </a:effectRef>
+          <a:fontRef idx="minor">
+            <a:schemeClr val="lt1"/>
+          </a:fontRef>
+        </p:style>
+        <p:txBody>
+          <a:bodyPr rtlCol="0" anchor="ctr"/>
+          <a:lstStyle/>
+          <a:p>
+            <a:pPr algn="ctr"/>
+          </a:p>
+        </p:txBody>
+      </p:sp>
+      <p:sp>
+        <p:nvSpPr>
+          <p:cNvPr id="5" name="TextBox 4"/>
+          <p:cNvSpPr txBox="1"/>
+          <p:nvPr/>
+        </p:nvSpPr>
+        <p:spPr>
+          <a:xfrm>
+            <a:off x="457200" y="1051560"/>
+            <a:ext cx="5486400" cy="640080"/>
+          </a:xfrm>
+          <a:prstGeom prst="rect">
+            <a:avLst/>
+          </a:prstGeom>
+          <a:noFill/>
+        </p:spPr>
+        <p:txBody>
+          <a:bodyPr wrap="square" lIns="45720" rIns="45720" tIns="18288" bIns="18288" anchor="ctr">
+            <a:spAutoFit/>
+          </a:bodyPr>
+          <a:lstStyle/>
+          <a:p>
+            <a:pPr algn="ctr"/>
+            <a:r>
+              <a:rPr sz="1800" b="1" i="0">
+                <a:solidFill>
+                  <a:srgbClr val="FFFFFF"/>
+                </a:solidFill>
+                <a:latin typeface="Calibri"/>
+              </a:rPr>
+              <a:t>Tentativo ingenuo</a:t>
+            </a:r>
+          </a:p>
+        </p:txBody>
+      </p:sp>
+      <p:sp>
+        <p:nvSpPr>
+          <p:cNvPr id="6" name="Rounded Rectangle 5"/>
+          <p:cNvSpPr/>
+          <p:nvPr/>
+        </p:nvSpPr>
+        <p:spPr>
+          <a:xfrm>
+            <a:off x="457200" y="1737360"/>
+            <a:ext cx="5486400" cy="4572000"/>
+          </a:xfrm>
+          <a:prstGeom prst="roundRect">
+            <a:avLst>
+              <a:gd name="adj" fmla="val 8000"/>
+            </a:avLst>
+          </a:prstGeom>
+          <a:solidFill>
+            <a:srgbClr val="FBFBFD"/>
+          </a:solidFill>
+          <a:ln w="25400">
+            <a:solidFill>
+              <a:srgbClr val="E63946"/>
+            </a:solidFill>
+          </a:ln>
+        </p:spPr>
+        <p:style>
+          <a:lnRef idx="1">
+            <a:schemeClr val="accent1"/>
+          </a:lnRef>
+          <a:fillRef idx="3">
+            <a:schemeClr val="accent1"/>
+          </a:fillRef>
+          <a:effectRef idx="2">
+            <a:schemeClr val="accent1"/>
+          </a:effectRef>
+          <a:fontRef idx="minor">
+            <a:schemeClr val="lt1"/>
+          </a:fontRef>
+        </p:style>
+        <p:txBody>
+          <a:bodyPr rtlCol="0" anchor="ctr"/>
+          <a:lstStyle/>
+          <a:p>
+            <a:pPr algn="ctr"/>
+          </a:p>
+        </p:txBody>
+      </p:sp>
+      <p:sp>
+        <p:nvSpPr>
+          <p:cNvPr id="7" name="TextBox 6"/>
+          <p:cNvSpPr txBox="1"/>
+          <p:nvPr/>
+        </p:nvSpPr>
+        <p:spPr>
+          <a:xfrm>
+            <a:off x="640080" y="1874519"/>
+            <a:ext cx="5120640" cy="4572000"/>
+          </a:xfrm>
+          <a:prstGeom prst="rect">
+            <a:avLst/>
+          </a:prstGeom>
+          <a:noFill/>
+        </p:spPr>
+        <p:txBody>
+          <a:bodyPr wrap="square">
+            <a:spAutoFit/>
+          </a:bodyPr>
+          <a:lstStyle/>
+          <a:p>
+            <a:pPr>
+              <a:lnSpc>
+                <a:spcPct val="150000"/>
+              </a:lnSpc>
+              <a:spcAft>
+                <a:spcPts val="400"/>
+              </a:spcAft>
+            </a:pPr>
+            <a:r>
+              <a:rPr sz="1500" b="1">
+                <a:solidFill>
+                  <a:srgbClr val="E63946"/>
+                </a:solidFill>
+                <a:latin typeface="Calibri"/>
+              </a:rPr>
+              <a:t>▸  </a:t>
+            </a:r>
+            <a:r>
+              <a:rPr sz="1500">
+                <a:solidFill>
+                  <a:srgbClr val="1A1A2E"/>
+                </a:solidFill>
+                <a:latin typeface="Calibri"/>
+              </a:rPr>
+              <a:t>s = s.replace("'", "")</a:t>
+            </a:r>
+          </a:p>
+          <a:p>
+            <a:pPr>
+              <a:lnSpc>
+                <a:spcPct val="150000"/>
+              </a:lnSpc>
+              <a:spcAft>
+                <a:spcPts val="400"/>
+              </a:spcAft>
+            </a:pPr>
+            <a:r>
+              <a:rPr sz="1500" b="1">
+                <a:solidFill>
+                  <a:srgbClr val="E63946"/>
+                </a:solidFill>
+                <a:latin typeface="Calibri"/>
+              </a:rPr>
+              <a:t>▸  </a:t>
+            </a:r>
+            <a:r>
+              <a:rPr sz="1500">
+                <a:solidFill>
+                  <a:srgbClr val="1A1A2E"/>
+                </a:solidFill>
+                <a:latin typeface="Calibri"/>
+              </a:rPr>
+              <a:t>Sembra di essere protetti...</a:t>
+            </a:r>
+          </a:p>
+          <a:p>
+            <a:pPr>
+              <a:lnSpc>
+                <a:spcPct val="150000"/>
+              </a:lnSpc>
+              <a:spcAft>
+                <a:spcPts val="400"/>
+              </a:spcAft>
+            </a:pPr>
+            <a:r>
+              <a:rPr sz="1500" b="1">
+                <a:solidFill>
+                  <a:srgbClr val="E63946"/>
+                </a:solidFill>
+                <a:latin typeface="Calibri"/>
+              </a:rPr>
+              <a:t>▸  </a:t>
+            </a:r>
+            <a:r>
+              <a:rPr sz="1500">
+                <a:solidFill>
+                  <a:srgbClr val="1A1A2E"/>
+                </a:solidFill>
+                <a:latin typeface="Calibri"/>
+              </a:rPr>
+              <a:t/>
+            </a:r>
+          </a:p>
+          <a:p>
+            <a:pPr>
+              <a:lnSpc>
+                <a:spcPct val="150000"/>
+              </a:lnSpc>
+              <a:spcAft>
+                <a:spcPts val="400"/>
+              </a:spcAft>
+            </a:pPr>
+            <a:r>
+              <a:rPr sz="1500" b="1">
+                <a:solidFill>
+                  <a:srgbClr val="E63946"/>
+                </a:solidFill>
+                <a:latin typeface="Calibri"/>
+              </a:rPr>
+              <a:t>▸  </a:t>
+            </a:r>
+            <a:r>
+              <a:rPr sz="1500">
+                <a:solidFill>
+                  <a:srgbClr val="1A1A2E"/>
+                </a:solidFill>
+                <a:latin typeface="Calibri"/>
+              </a:rPr>
+              <a:t>Bypass:</a:t>
+            </a:r>
+          </a:p>
+          <a:p>
+            <a:pPr>
+              <a:lnSpc>
+                <a:spcPct val="150000"/>
+              </a:lnSpc>
+              <a:spcAft>
+                <a:spcPts val="400"/>
+              </a:spcAft>
+            </a:pPr>
+            <a:r>
+              <a:rPr sz="1500" b="1">
+                <a:solidFill>
+                  <a:srgbClr val="E63946"/>
+                </a:solidFill>
+                <a:latin typeface="Calibri"/>
+              </a:rPr>
+              <a:t>▸  </a:t>
+            </a:r>
+            <a:r>
+              <a:rPr sz="1500">
+                <a:solidFill>
+                  <a:srgbClr val="1A1A2E"/>
+                </a:solidFill>
+                <a:latin typeface="Calibri"/>
+              </a:rPr>
+              <a:t>  %27 (URL encoded)</a:t>
+            </a:r>
+          </a:p>
+          <a:p>
+            <a:pPr>
+              <a:lnSpc>
+                <a:spcPct val="150000"/>
+              </a:lnSpc>
+              <a:spcAft>
+                <a:spcPts val="400"/>
+              </a:spcAft>
+            </a:pPr>
+            <a:r>
+              <a:rPr sz="1500" b="1">
+                <a:solidFill>
+                  <a:srgbClr val="E63946"/>
+                </a:solidFill>
+                <a:latin typeface="Calibri"/>
+              </a:rPr>
+              <a:t>▸  </a:t>
+            </a:r>
+            <a:r>
+              <a:rPr sz="1500">
+                <a:solidFill>
+                  <a:srgbClr val="1A1A2E"/>
+                </a:solidFill>
+                <a:latin typeface="Calibri"/>
+              </a:rPr>
+              <a:t>  \\' (escape)</a:t>
+            </a:r>
+          </a:p>
+          <a:p>
+            <a:pPr>
+              <a:lnSpc>
+                <a:spcPct val="150000"/>
+              </a:lnSpc>
+              <a:spcAft>
+                <a:spcPts val="400"/>
+              </a:spcAft>
+            </a:pPr>
+            <a:r>
+              <a:rPr sz="1500" b="1">
+                <a:solidFill>
+                  <a:srgbClr val="E63946"/>
+                </a:solidFill>
+                <a:latin typeface="Calibri"/>
+              </a:rPr>
+              <a:t>▸  </a:t>
+            </a:r>
+            <a:r>
+              <a:rPr sz="1500">
+                <a:solidFill>
+                  <a:srgbClr val="1A1A2E"/>
+                </a:solidFill>
+                <a:latin typeface="Calibri"/>
+              </a:rPr>
+              <a:t>  " (doppi apici)</a:t>
+            </a:r>
+          </a:p>
+          <a:p>
+            <a:pPr>
+              <a:lnSpc>
+                <a:spcPct val="150000"/>
+              </a:lnSpc>
+              <a:spcAft>
+                <a:spcPts val="400"/>
+              </a:spcAft>
+            </a:pPr>
+            <a:r>
+              <a:rPr sz="1500" b="1">
+                <a:solidFill>
+                  <a:srgbClr val="E63946"/>
+                </a:solidFill>
+                <a:latin typeface="Calibri"/>
+              </a:rPr>
+              <a:t>▸  </a:t>
+            </a:r>
+            <a:r>
+              <a:rPr sz="1500">
+                <a:solidFill>
+                  <a:srgbClr val="1A1A2E"/>
+                </a:solidFill>
+                <a:latin typeface="Calibri"/>
+              </a:rPr>
+              <a:t>  ʼ (Unicode lookalike)</a:t>
+            </a:r>
+          </a:p>
+          <a:p>
+            <a:pPr>
+              <a:lnSpc>
+                <a:spcPct val="150000"/>
+              </a:lnSpc>
+              <a:spcAft>
+                <a:spcPts val="400"/>
+              </a:spcAft>
+            </a:pPr>
+            <a:r>
+              <a:rPr sz="1500" b="1">
+                <a:solidFill>
+                  <a:srgbClr val="E63946"/>
+                </a:solidFill>
+                <a:latin typeface="Calibri"/>
+              </a:rPr>
+              <a:t>▸  </a:t>
+            </a:r>
+            <a:r>
+              <a:rPr sz="1500">
+                <a:solidFill>
+                  <a:srgbClr val="1A1A2E"/>
+                </a:solidFill>
+                <a:latin typeface="Calibri"/>
+              </a:rPr>
+              <a:t>  1 OR 1=1 (numerica)</a:t>
+            </a:r>
+          </a:p>
+        </p:txBody>
+      </p:sp>
+      <p:sp>
+        <p:nvSpPr>
+          <p:cNvPr id="8" name="Rounded Rectangle 7"/>
+          <p:cNvSpPr/>
+          <p:nvPr/>
+        </p:nvSpPr>
+        <p:spPr>
+          <a:xfrm>
+            <a:off x="6217920" y="1051560"/>
+            <a:ext cx="5486400" cy="640080"/>
+          </a:xfrm>
+          <a:prstGeom prst="roundRect">
+            <a:avLst>
+              <a:gd name="adj" fmla="val 8000"/>
+            </a:avLst>
+          </a:prstGeom>
+          <a:solidFill>
+            <a:srgbClr val="06A77D"/>
+          </a:solidFill>
+          <a:ln>
+            <a:noFill/>
+          </a:ln>
+        </p:spPr>
+        <p:style>
+          <a:lnRef idx="1">
+            <a:schemeClr val="accent1"/>
+          </a:lnRef>
+          <a:fillRef idx="3">
+            <a:schemeClr val="accent1"/>
+          </a:fillRef>
+          <a:effectRef idx="2">
+            <a:schemeClr val="accent1"/>
+          </a:effectRef>
+          <a:fontRef idx="minor">
+            <a:schemeClr val="lt1"/>
+          </a:fontRef>
+        </p:style>
+        <p:txBody>
+          <a:bodyPr rtlCol="0" anchor="ctr"/>
+          <a:lstStyle/>
+          <a:p>
+            <a:pPr algn="ctr"/>
+          </a:p>
+        </p:txBody>
+      </p:sp>
+      <p:sp>
+        <p:nvSpPr>
+          <p:cNvPr id="9" name="TextBox 8"/>
+          <p:cNvSpPr txBox="1"/>
+          <p:nvPr/>
+        </p:nvSpPr>
+        <p:spPr>
+          <a:xfrm>
+            <a:off x="6217920" y="1051560"/>
+            <a:ext cx="5486400" cy="640080"/>
+          </a:xfrm>
+          <a:prstGeom prst="rect">
+            <a:avLst/>
+          </a:prstGeom>
+          <a:noFill/>
+        </p:spPr>
+        <p:txBody>
+          <a:bodyPr wrap="square" lIns="45720" rIns="45720" tIns="18288" bIns="18288" anchor="ctr">
+            <a:spAutoFit/>
+          </a:bodyPr>
+          <a:lstStyle/>
+          <a:p>
+            <a:pPr algn="ctr"/>
+            <a:r>
+              <a:rPr sz="1800" b="1" i="0">
+                <a:solidFill>
+                  <a:srgbClr val="FFFFFF"/>
+                </a:solidFill>
+                <a:latin typeface="Calibri"/>
+              </a:rPr>
+              <a:t>Soluzione corretta</a:t>
+            </a:r>
+          </a:p>
+        </p:txBody>
+      </p:sp>
+      <p:sp>
+        <p:nvSpPr>
+          <p:cNvPr id="10" name="Rounded Rectangle 9"/>
+          <p:cNvSpPr/>
+          <p:nvPr/>
+        </p:nvSpPr>
+        <p:spPr>
+          <a:xfrm>
+            <a:off x="6217920" y="1737360"/>
+            <a:ext cx="5486400" cy="4572000"/>
+          </a:xfrm>
+          <a:prstGeom prst="roundRect">
+            <a:avLst>
+              <a:gd name="adj" fmla="val 8000"/>
+            </a:avLst>
+          </a:prstGeom>
+          <a:solidFill>
+            <a:srgbClr val="FBFBFD"/>
+          </a:solidFill>
+          <a:ln w="25400">
+            <a:solidFill>
+              <a:srgbClr val="06A77D"/>
+            </a:solidFill>
+          </a:ln>
+        </p:spPr>
+        <p:style>
+          <a:lnRef idx="1">
+            <a:schemeClr val="accent1"/>
+          </a:lnRef>
+          <a:fillRef idx="3">
+            <a:schemeClr val="accent1"/>
+          </a:fillRef>
+          <a:effectRef idx="2">
+            <a:schemeClr val="accent1"/>
+          </a:effectRef>
+          <a:fontRef idx="minor">
+            <a:schemeClr val="lt1"/>
+          </a:fontRef>
+        </p:style>
+        <p:txBody>
+          <a:bodyPr rtlCol="0" anchor="ctr"/>
+          <a:lstStyle/>
+          <a:p>
+            <a:pPr algn="ctr"/>
+          </a:p>
+        </p:txBody>
+      </p:sp>
+      <p:sp>
+        <p:nvSpPr>
+          <p:cNvPr id="11" name="TextBox 10"/>
+          <p:cNvSpPr txBox="1"/>
+          <p:nvPr/>
+        </p:nvSpPr>
+        <p:spPr>
+          <a:xfrm>
+            <a:off x="6400800" y="1874519"/>
+            <a:ext cx="5120640" cy="4572000"/>
+          </a:xfrm>
+          <a:prstGeom prst="rect">
+            <a:avLst/>
+          </a:prstGeom>
+          <a:noFill/>
+        </p:spPr>
+        <p:txBody>
+          <a:bodyPr wrap="square">
+            <a:spAutoFit/>
+          </a:bodyPr>
+          <a:lstStyle/>
+          <a:p>
+            <a:pPr>
+              <a:lnSpc>
+                <a:spcPct val="150000"/>
+              </a:lnSpc>
+              <a:spcAft>
+                <a:spcPts val="400"/>
+              </a:spcAft>
+            </a:pPr>
+            <a:r>
+              <a:rPr sz="1500" b="1">
+                <a:solidFill>
+                  <a:srgbClr val="06A77D"/>
+                </a:solidFill>
+                <a:latin typeface="Calibri"/>
+              </a:rPr>
+              <a:t>▸  </a:t>
+            </a:r>
+            <a:r>
+              <a:rPr sz="1500">
+                <a:solidFill>
+                  <a:srgbClr val="1A1A2E"/>
+                </a:solidFill>
+                <a:latin typeface="Calibri"/>
+              </a:rPr>
+              <a:t>Query parametrizzate</a:t>
+            </a:r>
+          </a:p>
+          <a:p>
+            <a:pPr>
+              <a:lnSpc>
+                <a:spcPct val="150000"/>
+              </a:lnSpc>
+              <a:spcAft>
+                <a:spcPts val="400"/>
+              </a:spcAft>
+            </a:pPr>
+            <a:r>
+              <a:rPr sz="1500" b="1">
+                <a:solidFill>
+                  <a:srgbClr val="06A77D"/>
+                </a:solidFill>
+                <a:latin typeface="Calibri"/>
+              </a:rPr>
+              <a:t>▸  </a:t>
+            </a:r>
+            <a:r>
+              <a:rPr sz="1500">
+                <a:solidFill>
+                  <a:srgbClr val="1A1A2E"/>
+                </a:solidFill>
+                <a:latin typeface="Calibri"/>
+              </a:rPr>
+              <a:t>Separi STRUTTURA da DATI</a:t>
+            </a:r>
+          </a:p>
+          <a:p>
+            <a:pPr>
+              <a:lnSpc>
+                <a:spcPct val="150000"/>
+              </a:lnSpc>
+              <a:spcAft>
+                <a:spcPts val="400"/>
+              </a:spcAft>
+            </a:pPr>
+            <a:r>
+              <a:rPr sz="1500" b="1">
+                <a:solidFill>
+                  <a:srgbClr val="06A77D"/>
+                </a:solidFill>
+                <a:latin typeface="Calibri"/>
+              </a:rPr>
+              <a:t>▸  </a:t>
+            </a:r>
+            <a:r>
+              <a:rPr sz="1500">
+                <a:solidFill>
+                  <a:srgbClr val="1A1A2E"/>
+                </a:solidFill>
+                <a:latin typeface="Calibri"/>
+              </a:rPr>
+              <a:t/>
+            </a:r>
+          </a:p>
+          <a:p>
+            <a:pPr>
+              <a:lnSpc>
+                <a:spcPct val="150000"/>
+              </a:lnSpc>
+              <a:spcAft>
+                <a:spcPts val="400"/>
+              </a:spcAft>
+            </a:pPr>
+            <a:r>
+              <a:rPr sz="1500" b="1">
+                <a:solidFill>
+                  <a:srgbClr val="06A77D"/>
+                </a:solidFill>
+                <a:latin typeface="Calibri"/>
+              </a:rPr>
+              <a:t>▸  </a:t>
+            </a:r>
+            <a:r>
+              <a:rPr sz="1500">
+                <a:solidFill>
+                  <a:srgbClr val="1A1A2E"/>
+                </a:solidFill>
+                <a:latin typeface="Calibri"/>
+              </a:rPr>
+              <a:t>Il driver tratta i dati</a:t>
+            </a:r>
+          </a:p>
+          <a:p>
+            <a:pPr>
+              <a:lnSpc>
+                <a:spcPct val="150000"/>
+              </a:lnSpc>
+              <a:spcAft>
+                <a:spcPts val="400"/>
+              </a:spcAft>
+            </a:pPr>
+            <a:r>
+              <a:rPr sz="1500" b="1">
+                <a:solidFill>
+                  <a:srgbClr val="06A77D"/>
+                </a:solidFill>
+                <a:latin typeface="Calibri"/>
+              </a:rPr>
+              <a:t>▸  </a:t>
+            </a:r>
+            <a:r>
+              <a:rPr sz="1500">
+                <a:solidFill>
+                  <a:srgbClr val="1A1A2E"/>
+                </a:solidFill>
+                <a:latin typeface="Calibri"/>
+              </a:rPr>
+              <a:t>come VALORI, mai come SQL</a:t>
+            </a:r>
+          </a:p>
+          <a:p>
+            <a:pPr>
+              <a:lnSpc>
+                <a:spcPct val="150000"/>
+              </a:lnSpc>
+              <a:spcAft>
+                <a:spcPts val="400"/>
+              </a:spcAft>
+            </a:pPr>
+            <a:r>
+              <a:rPr sz="1500" b="1">
+                <a:solidFill>
+                  <a:srgbClr val="06A77D"/>
+                </a:solidFill>
+                <a:latin typeface="Calibri"/>
+              </a:rPr>
+              <a:t>▸  </a:t>
+            </a:r>
+            <a:r>
+              <a:rPr sz="1500">
+                <a:solidFill>
+                  <a:srgbClr val="1A1A2E"/>
+                </a:solidFill>
+                <a:latin typeface="Calibri"/>
+              </a:rPr>
+              <a:t/>
+            </a:r>
+          </a:p>
+          <a:p>
+            <a:pPr>
+              <a:lnSpc>
+                <a:spcPct val="150000"/>
+              </a:lnSpc>
+              <a:spcAft>
+                <a:spcPts val="400"/>
+              </a:spcAft>
+            </a:pPr>
+            <a:r>
+              <a:rPr sz="1500" b="1">
+                <a:solidFill>
+                  <a:srgbClr val="06A77D"/>
+                </a:solidFill>
+                <a:latin typeface="Calibri"/>
+              </a:rPr>
+              <a:t>▸  </a:t>
+            </a:r>
+            <a:r>
+              <a:rPr sz="1500">
+                <a:solidFill>
+                  <a:srgbClr val="1A1A2E"/>
+                </a:solidFill>
+                <a:latin typeface="Calibri"/>
+              </a:rPr>
+              <a:t>Anche con QUALUNQUE input,</a:t>
+            </a:r>
+          </a:p>
+          <a:p>
+            <a:pPr>
+              <a:lnSpc>
+                <a:spcPct val="150000"/>
+              </a:lnSpc>
+              <a:spcAft>
+                <a:spcPts val="400"/>
+              </a:spcAft>
+            </a:pPr>
+            <a:r>
+              <a:rPr sz="1500" b="1">
+                <a:solidFill>
+                  <a:srgbClr val="06A77D"/>
+                </a:solidFill>
+                <a:latin typeface="Calibri"/>
+              </a:rPr>
+              <a:t>▸  </a:t>
+            </a:r>
+            <a:r>
+              <a:rPr sz="1500">
+                <a:solidFill>
+                  <a:srgbClr val="1A1A2E"/>
+                </a:solidFill>
+                <a:latin typeface="Calibri"/>
+              </a:rPr>
+              <a:t>non viene interpretato</a:t>
+            </a:r>
+          </a:p>
+          <a:p>
+            <a:pPr>
+              <a:lnSpc>
+                <a:spcPct val="150000"/>
+              </a:lnSpc>
+              <a:spcAft>
+                <a:spcPts val="400"/>
+              </a:spcAft>
+            </a:pPr>
+            <a:r>
+              <a:rPr sz="1500" b="1">
+                <a:solidFill>
+                  <a:srgbClr val="06A77D"/>
+                </a:solidFill>
+                <a:latin typeface="Calibri"/>
+              </a:rPr>
+              <a:t>▸  </a:t>
+            </a:r>
+            <a:r>
+              <a:rPr sz="1500">
+                <a:solidFill>
+                  <a:srgbClr val="1A1A2E"/>
+                </a:solidFill>
+                <a:latin typeface="Calibri"/>
+              </a:rPr>
+              <a:t/>
+            </a:r>
+          </a:p>
+          <a:p>
+            <a:pPr>
+              <a:lnSpc>
+                <a:spcPct val="150000"/>
+              </a:lnSpc>
+              <a:spcAft>
+                <a:spcPts val="400"/>
+              </a:spcAft>
+            </a:pPr>
+            <a:r>
+              <a:rPr sz="1500" b="1">
+                <a:solidFill>
+                  <a:srgbClr val="06A77D"/>
+                </a:solidFill>
+                <a:latin typeface="Calibri"/>
+              </a:rPr>
+              <a:t>▸  </a:t>
+            </a:r>
+            <a:r>
+              <a:rPr sz="1500">
+                <a:solidFill>
+                  <a:srgbClr val="1A1A2E"/>
+                </a:solidFill>
+                <a:latin typeface="Calibri"/>
+              </a:rPr>
+              <a:t>Whitelist &gt; Blacklist (sempre)</a:t>
+            </a:r>
+          </a:p>
+        </p:txBody>
+      </p:sp>
+      <p:cxnSp>
+        <p:nvCxnSpPr>
+          <p:cNvPr id="12" name="Connector 11"/>
+          <p:cNvCxnSpPr/>
+          <p:nvPr/>
+        </p:nvCxnSpPr>
+        <p:spPr>
+          <a:xfrm>
+            <a:off x="457200" y="6446520"/>
+            <a:ext cx="11274552" cy="0"/>
+          </a:xfrm>
+          <a:prstGeom prst="line">
+            <a:avLst/>
+          </a:prstGeom>
+          <a:ln w="19050">
+            <a:solidFill>
+              <a:srgbClr val="00A0B0"/>
+            </a:solidFill>
+          </a:ln>
+        </p:spPr>
+        <p:style>
+          <a:lnRef idx="2">
+            <a:schemeClr val="accent1"/>
+          </a:lnRef>
+          <a:fillRef idx="0">
+            <a:schemeClr val="accent1"/>
+          </a:fillRef>
+          <a:effectRef idx="1">
+            <a:schemeClr val="accent1"/>
+          </a:effectRef>
+          <a:fontRef idx="minor">
+            <a:schemeClr val="tx1"/>
+          </a:fontRef>
+        </p:style>
+      </p:cxnSp>
+      <p:sp>
+        <p:nvSpPr>
+          <p:cNvPr id="13" name="TextBox 12"/>
+          <p:cNvSpPr txBox="1"/>
+          <p:nvPr/>
+        </p:nvSpPr>
+        <p:spPr>
+          <a:xfrm>
+            <a:off x="457200" y="6473952"/>
+            <a:ext cx="7315200" cy="292608"/>
+          </a:xfrm>
+          <a:prstGeom prst="rect">
+            <a:avLst/>
+          </a:prstGeom>
+          <a:noFill/>
+        </p:spPr>
+        <p:txBody>
+          <a:bodyPr wrap="square" lIns="45720" rIns="45720" tIns="18288" bIns="18288" anchor="t">
+            <a:spAutoFit/>
+          </a:bodyPr>
+          <a:lstStyle/>
+          <a:p>
+            <a:pPr algn="l"/>
+            <a:r>
+              <a:rPr sz="1000" b="0" i="0">
+                <a:solidFill>
+                  <a:srgbClr val="6B7280"/>
+                </a:solidFill>
+                <a:latin typeface="Calibri"/>
+              </a:rPr>
+              <a:t>Secure Coding · Corso IFTS STEM · A. Manneschi · 2024/2025</a:t>
+            </a:r>
+          </a:p>
+        </p:txBody>
+      </p:sp>
+      <p:sp>
+        <p:nvSpPr>
+          <p:cNvPr id="14" name="TextBox 13"/>
+          <p:cNvSpPr txBox="1"/>
+          <p:nvPr/>
+        </p:nvSpPr>
+        <p:spPr>
+          <a:xfrm>
+            <a:off x="10515600" y="6473952"/>
+            <a:ext cx="1188720" cy="292608"/>
+          </a:xfrm>
+          <a:prstGeom prst="rect">
+            <a:avLst/>
+          </a:prstGeom>
+          <a:noFill/>
+        </p:spPr>
+        <p:txBody>
+          <a:bodyPr wrap="square" lIns="45720" rIns="45720" tIns="18288" bIns="18288" anchor="t">
+            <a:spAutoFit/>
+          </a:bodyPr>
+          <a:lstStyle/>
+          <a:p>
+            <a:pPr algn="r"/>
+            <a:r>
+              <a:rPr sz="1000" b="1" i="0">
+                <a:solidFill>
+                  <a:srgbClr val="6B7280"/>
+                </a:solidFill>
+                <a:latin typeface="Calibri"/>
+              </a:rPr>
+              <a:t>L3  ·  10/15</a:t>
+            </a:r>
+          </a:p>
+        </p:txBody>
+      </p:sp>
+    </p:spTree>
+  </p:cSld>
+  <p:clrMapOvr>
+    <a:masterClrMapping/>
+  </p:clrMapOvr>
+</p:sld>
+</file>
+
+<file path=ppt/slides/slide11.xml><?xml version="1.0" encoding="utf-8"?>
 <p:sld xmlns:a="http://schemas.openxmlformats.org/drawingml/2006/main" xmlns:p="http://schemas.openxmlformats.org/presentationml/2006/main" xmlns:r="http://schemas.openxmlformats.org/officeDocument/2006/relationships">
   <p:cSld>
     <p:spTree>
@@ -4125,427 +5159,7 @@
                 </a:solidFill>
                 <a:latin typeface="Calibri"/>
               </a:rPr>
-              <a:t>L3  ·  10/14</a:t>
-            </a:r>
-          </a:p>
-        </p:txBody>
-      </p:sp>
-    </p:spTree>
-  </p:cSld>
-  <p:clrMapOvr>
-    <a:masterClrMapping/>
-  </p:clrMapOvr>
-</p:sld>
-</file>
-
-<file path=ppt/slides/slide11.xml><?xml version="1.0" encoding="utf-8"?>
-<p:sld xmlns:a="http://schemas.openxmlformats.org/drawingml/2006/main" xmlns:p="http://schemas.openxmlformats.org/presentationml/2006/main" xmlns:r="http://schemas.openxmlformats.org/officeDocument/2006/relationships">
-  <p:cSld>
-    <p:spTree>
-      <p:nvGrpSpPr>
-        <p:cNvPr id="1" name=""/>
-        <p:cNvGrpSpPr/>
-        <p:nvPr/>
-      </p:nvGrpSpPr>
-      <p:grpSpPr/>
-      <p:sp>
-        <p:nvSpPr>
-          <p:cNvPr id="2" name="Rectangle 1"/>
-          <p:cNvSpPr/>
-          <p:nvPr/>
-        </p:nvSpPr>
-        <p:spPr>
-          <a:xfrm>
-            <a:off x="0" y="0"/>
-            <a:ext cx="12191695" cy="777240"/>
-          </a:xfrm>
-          <a:prstGeom prst="rect">
-            <a:avLst/>
-          </a:prstGeom>
-          <a:solidFill>
-            <a:srgbClr val="0F2D52"/>
-          </a:solidFill>
-          <a:ln>
-            <a:noFill/>
-          </a:ln>
-        </p:spPr>
-        <p:style>
-          <a:lnRef idx="1">
-            <a:schemeClr val="accent1"/>
-          </a:lnRef>
-          <a:fillRef idx="3">
-            <a:schemeClr val="accent1"/>
-          </a:fillRef>
-          <a:effectRef idx="2">
-            <a:schemeClr val="accent1"/>
-          </a:effectRef>
-          <a:fontRef idx="minor">
-            <a:schemeClr val="lt1"/>
-          </a:fontRef>
-        </p:style>
-        <p:txBody>
-          <a:bodyPr rtlCol="0" anchor="ctr"/>
-          <a:lstStyle/>
-          <a:p>
-            <a:pPr algn="ctr"/>
-          </a:p>
-        </p:txBody>
-      </p:sp>
-      <p:sp>
-        <p:nvSpPr>
-          <p:cNvPr id="3" name="TextBox 2"/>
-          <p:cNvSpPr txBox="1"/>
-          <p:nvPr/>
-        </p:nvSpPr>
-        <p:spPr>
-          <a:xfrm>
-            <a:off x="457200" y="164592"/>
-            <a:ext cx="10972800" cy="502920"/>
-          </a:xfrm>
-          <a:prstGeom prst="rect">
-            <a:avLst/>
-          </a:prstGeom>
-          <a:noFill/>
-        </p:spPr>
-        <p:txBody>
-          <a:bodyPr wrap="square" lIns="45720" rIns="45720" tIns="18288" bIns="18288" anchor="ctr">
-            <a:spAutoFit/>
-          </a:bodyPr>
-          <a:lstStyle/>
-          <a:p>
-            <a:pPr algn="l"/>
-            <a:r>
-              <a:rPr sz="2400" b="1" i="0">
-                <a:solidFill>
-                  <a:srgbClr val="FFFFFF"/>
-                </a:solidFill>
-                <a:latin typeface="Calibri"/>
-              </a:rPr>
-              <a:t>🛡  Difese in profondità</a:t>
-            </a:r>
-          </a:p>
-        </p:txBody>
-      </p:sp>
-      <p:sp>
-        <p:nvSpPr>
-          <p:cNvPr id="4" name="TextBox 3"/>
-          <p:cNvSpPr txBox="1"/>
-          <p:nvPr/>
-        </p:nvSpPr>
-        <p:spPr>
-          <a:xfrm>
-            <a:off x="640080" y="1097280"/>
-            <a:ext cx="10972800" cy="5029200"/>
-          </a:xfrm>
-          <a:prstGeom prst="rect">
-            <a:avLst/>
-          </a:prstGeom>
-          <a:noFill/>
-        </p:spPr>
-        <p:txBody>
-          <a:bodyPr wrap="square">
-            <a:spAutoFit/>
-          </a:bodyPr>
-          <a:lstStyle/>
-          <a:p>
-            <a:pPr>
-              <a:lnSpc>
-                <a:spcPct val="150000"/>
-              </a:lnSpc>
-              <a:spcAft>
-                <a:spcPts val="400"/>
-              </a:spcAft>
-            </a:pPr>
-            <a:r>
-              <a:rPr sz="2000" b="1">
-                <a:solidFill>
-                  <a:srgbClr val="00A0B0"/>
-                </a:solidFill>
-                <a:latin typeface="Calibri"/>
-              </a:rPr>
-              <a:t>▸  </a:t>
-            </a:r>
-            <a:r>
-              <a:rPr sz="2000">
-                <a:solidFill>
-                  <a:srgbClr val="1A1A2E"/>
-                </a:solidFill>
-                <a:latin typeface="Calibri"/>
-              </a:rPr>
-              <a:t>1. Query parametrizzate (difesa PRIMARIA, non sostituibile)</a:t>
-            </a:r>
-          </a:p>
-          <a:p>
-            <a:pPr>
-              <a:lnSpc>
-                <a:spcPct val="150000"/>
-              </a:lnSpc>
-              <a:spcAft>
-                <a:spcPts val="400"/>
-              </a:spcAft>
-            </a:pPr>
-            <a:r>
-              <a:rPr sz="2000" b="1">
-                <a:solidFill>
-                  <a:srgbClr val="00A0B0"/>
-                </a:solidFill>
-                <a:latin typeface="Calibri"/>
-              </a:rPr>
-              <a:t>▸  </a:t>
-            </a:r>
-            <a:r>
-              <a:rPr sz="2000">
-                <a:solidFill>
-                  <a:srgbClr val="1A1A2E"/>
-                </a:solidFill>
-                <a:latin typeface="Calibri"/>
-              </a:rPr>
-              <a:t>2. ORM (forza il pattern corretto)</a:t>
-            </a:r>
-          </a:p>
-          <a:p>
-            <a:pPr>
-              <a:lnSpc>
-                <a:spcPct val="150000"/>
-              </a:lnSpc>
-              <a:spcAft>
-                <a:spcPts val="400"/>
-              </a:spcAft>
-            </a:pPr>
-            <a:r>
-              <a:rPr sz="2000" b="1">
-                <a:solidFill>
-                  <a:srgbClr val="00A0B0"/>
-                </a:solidFill>
-                <a:latin typeface="Calibri"/>
-              </a:rPr>
-              <a:t>▸  </a:t>
-            </a:r>
-            <a:r>
-              <a:rPr sz="2000">
-                <a:solidFill>
-                  <a:srgbClr val="1A1A2E"/>
-                </a:solidFill>
-                <a:latin typeface="Calibri"/>
-              </a:rPr>
-              <a:t>3. Least privilege per l'utente DB (no DROP/CREATE/GRANT)</a:t>
-            </a:r>
-          </a:p>
-          <a:p>
-            <a:pPr>
-              <a:lnSpc>
-                <a:spcPct val="150000"/>
-              </a:lnSpc>
-              <a:spcAft>
-                <a:spcPts val="400"/>
-              </a:spcAft>
-            </a:pPr>
-            <a:r>
-              <a:rPr sz="2000" b="1">
-                <a:solidFill>
-                  <a:srgbClr val="00A0B0"/>
-                </a:solidFill>
-                <a:latin typeface="Calibri"/>
-              </a:rPr>
-              <a:t>▸  </a:t>
-            </a:r>
-            <a:r>
-              <a:rPr sz="2000">
-                <a:solidFill>
-                  <a:srgbClr val="1A1A2E"/>
-                </a:solidFill>
-                <a:latin typeface="Calibri"/>
-              </a:rPr>
-              <a:t>4. Errori generici al client, dettagli nei log interni</a:t>
-            </a:r>
-          </a:p>
-          <a:p>
-            <a:pPr>
-              <a:lnSpc>
-                <a:spcPct val="150000"/>
-              </a:lnSpc>
-              <a:spcAft>
-                <a:spcPts val="400"/>
-              </a:spcAft>
-            </a:pPr>
-            <a:r>
-              <a:rPr sz="2000" b="1">
-                <a:solidFill>
-                  <a:srgbClr val="00A0B0"/>
-                </a:solidFill>
-                <a:latin typeface="Calibri"/>
-              </a:rPr>
-              <a:t>▸  </a:t>
-            </a:r>
-            <a:r>
-              <a:rPr sz="2000">
-                <a:solidFill>
-                  <a:srgbClr val="1A1A2E"/>
-                </a:solidFill>
-                <a:latin typeface="Calibri"/>
-              </a:rPr>
-              <a:t>5. WAF (Web Application Firewall) come strato aggiuntivo</a:t>
-            </a:r>
-          </a:p>
-          <a:p>
-            <a:pPr>
-              <a:lnSpc>
-                <a:spcPct val="150000"/>
-              </a:lnSpc>
-              <a:spcAft>
-                <a:spcPts val="400"/>
-              </a:spcAft>
-            </a:pPr>
-            <a:r>
-              <a:rPr sz="2000" b="1">
-                <a:solidFill>
-                  <a:srgbClr val="00A0B0"/>
-                </a:solidFill>
-                <a:latin typeface="Calibri"/>
-              </a:rPr>
-              <a:t>▸  </a:t>
-            </a:r>
-            <a:r>
-              <a:rPr sz="2000">
-                <a:solidFill>
-                  <a:srgbClr val="1A1A2E"/>
-                </a:solidFill>
-                <a:latin typeface="Calibri"/>
-              </a:rPr>
-              <a:t>6. Rate limiting sul login (anti brute force)</a:t>
-            </a:r>
-          </a:p>
-          <a:p>
-            <a:pPr>
-              <a:lnSpc>
-                <a:spcPct val="150000"/>
-              </a:lnSpc>
-              <a:spcAft>
-                <a:spcPts val="400"/>
-              </a:spcAft>
-            </a:pPr>
-            <a:r>
-              <a:rPr sz="2000" b="1">
-                <a:solidFill>
-                  <a:srgbClr val="00A0B0"/>
-                </a:solidFill>
-                <a:latin typeface="Calibri"/>
-              </a:rPr>
-              <a:t>▸  </a:t>
-            </a:r>
-            <a:r>
-              <a:rPr sz="2000">
-                <a:solidFill>
-                  <a:srgbClr val="1A1A2E"/>
-                </a:solidFill>
-                <a:latin typeface="Calibri"/>
-              </a:rPr>
-              <a:t>7. Audit log dei tentativi sospetti</a:t>
-            </a:r>
-          </a:p>
-        </p:txBody>
-      </p:sp>
-      <p:cxnSp>
-        <p:nvCxnSpPr>
-          <p:cNvPr id="5" name="Connector 4"/>
-          <p:cNvCxnSpPr/>
-          <p:nvPr/>
-        </p:nvCxnSpPr>
-        <p:spPr>
-          <a:xfrm>
-            <a:off x="457200" y="6446520"/>
-            <a:ext cx="11274552" cy="0"/>
-          </a:xfrm>
-          <a:prstGeom prst="line">
-            <a:avLst/>
-          </a:prstGeom>
-          <a:ln w="19050">
-            <a:solidFill>
-              <a:srgbClr val="00A0B0"/>
-            </a:solidFill>
-          </a:ln>
-        </p:spPr>
-        <p:style>
-          <a:lnRef idx="2">
-            <a:schemeClr val="accent1"/>
-          </a:lnRef>
-          <a:fillRef idx="0">
-            <a:schemeClr val="accent1"/>
-          </a:fillRef>
-          <a:effectRef idx="1">
-            <a:schemeClr val="accent1"/>
-          </a:effectRef>
-          <a:fontRef idx="minor">
-            <a:schemeClr val="tx1"/>
-          </a:fontRef>
-        </p:style>
-      </p:cxnSp>
-      <p:sp>
-        <p:nvSpPr>
-          <p:cNvPr id="6" name="TextBox 5"/>
-          <p:cNvSpPr txBox="1"/>
-          <p:nvPr/>
-        </p:nvSpPr>
-        <p:spPr>
-          <a:xfrm>
-            <a:off x="457200" y="6473952"/>
-            <a:ext cx="7315200" cy="292608"/>
-          </a:xfrm>
-          <a:prstGeom prst="rect">
-            <a:avLst/>
-          </a:prstGeom>
-          <a:noFill/>
-        </p:spPr>
-        <p:txBody>
-          <a:bodyPr wrap="square" lIns="45720" rIns="45720" tIns="18288" bIns="18288" anchor="t">
-            <a:spAutoFit/>
-          </a:bodyPr>
-          <a:lstStyle/>
-          <a:p>
-            <a:pPr algn="l"/>
-            <a:r>
-              <a:rPr sz="1000" b="0" i="0">
-                <a:solidFill>
-                  <a:srgbClr val="6B7280"/>
-                </a:solidFill>
-                <a:latin typeface="Calibri"/>
-              </a:rPr>
-              <a:t>Secure Coding · Corso IFTS STEM · A. Manneschi · 2024/2025</a:t>
-            </a:r>
-          </a:p>
-        </p:txBody>
-      </p:sp>
-      <p:sp>
-        <p:nvSpPr>
-          <p:cNvPr id="7" name="TextBox 6"/>
-          <p:cNvSpPr txBox="1"/>
-          <p:nvPr/>
-        </p:nvSpPr>
-        <p:spPr>
-          <a:xfrm>
-            <a:off x="10515600" y="6473952"/>
-            <a:ext cx="1188720" cy="292608"/>
-          </a:xfrm>
-          <a:prstGeom prst="rect">
-            <a:avLst/>
-          </a:prstGeom>
-          <a:noFill/>
-        </p:spPr>
-        <p:txBody>
-          <a:bodyPr wrap="square" lIns="45720" rIns="45720" tIns="18288" bIns="18288" anchor="t">
-            <a:spAutoFit/>
-          </a:bodyPr>
-          <a:lstStyle/>
-          <a:p>
-            <a:pPr algn="r"/>
-            <a:r>
-              <a:rPr sz="1000" b="1" i="0">
-                <a:solidFill>
-                  <a:srgbClr val="6B7280"/>
-                </a:solidFill>
-                <a:latin typeface="Calibri"/>
-              </a:rPr>
-              <a:t>L3  ·  11/14</a:t>
+              <a:t>L3  ·  11/15</a:t>
             </a:r>
           </a:p>
         </p:txBody>
@@ -4641,64 +5255,21 @@
                 </a:solidFill>
                 <a:latin typeface="Calibri"/>
               </a:rPr>
-              <a:t>📌  Cosa portare a casa</a:t>
-            </a:r>
-          </a:p>
-        </p:txBody>
-      </p:sp>
-      <p:sp>
-        <p:nvSpPr>
-          <p:cNvPr id="4" name="Oval 3"/>
-          <p:cNvSpPr/>
-          <p:nvPr/>
-        </p:nvSpPr>
-        <p:spPr>
-          <a:xfrm>
-            <a:off x="914400" y="1440180"/>
-            <a:ext cx="777240" cy="777240"/>
-          </a:xfrm>
-          <a:prstGeom prst="ellipse">
-            <a:avLst/>
-          </a:prstGeom>
-          <a:solidFill>
-            <a:srgbClr val="00A0B0"/>
-          </a:solidFill>
-          <a:ln>
-            <a:noFill/>
-          </a:ln>
-        </p:spPr>
-        <p:style>
-          <a:lnRef idx="1">
-            <a:schemeClr val="accent1"/>
-          </a:lnRef>
-          <a:fillRef idx="3">
-            <a:schemeClr val="accent1"/>
-          </a:fillRef>
-          <a:effectRef idx="2">
-            <a:schemeClr val="accent1"/>
-          </a:effectRef>
-          <a:fontRef idx="minor">
-            <a:schemeClr val="lt1"/>
-          </a:fontRef>
-        </p:style>
-        <p:txBody>
-          <a:bodyPr rtlCol="0" anchor="ctr"/>
-          <a:lstStyle/>
-          <a:p>
-            <a:pPr algn="ctr"/>
-          </a:p>
-        </p:txBody>
-      </p:sp>
-      <p:sp>
-        <p:nvSpPr>
-          <p:cNvPr id="5" name="TextBox 4"/>
+              <a:t>🛡  Difese in profondità</a:t>
+            </a:r>
+          </a:p>
+        </p:txBody>
+      </p:sp>
+      <p:sp>
+        <p:nvSpPr>
+          <p:cNvPr id="4" name="TextBox 3"/>
           <p:cNvSpPr txBox="1"/>
           <p:nvPr/>
         </p:nvSpPr>
         <p:spPr>
           <a:xfrm>
-            <a:off x="914400" y="1440180"/>
-            <a:ext cx="777240" cy="777240"/>
+            <a:off x="640080" y="1097280"/>
+            <a:ext cx="10972800" cy="5029200"/>
           </a:xfrm>
           <a:prstGeom prst="rect">
             <a:avLst/>
@@ -4706,749 +5277,211 @@
           <a:noFill/>
         </p:spPr>
         <p:txBody>
-          <a:bodyPr wrap="square" lIns="45720" rIns="45720" tIns="18288" bIns="18288" anchor="ctr">
+          <a:bodyPr wrap="square">
             <a:spAutoFit/>
           </a:bodyPr>
           <a:lstStyle/>
           <a:p>
-            <a:pPr algn="ctr"/>
-            <a:r>
-              <a:rPr sz="2800" b="1" i="0">
-                <a:solidFill>
-                  <a:srgbClr val="FFFFFF"/>
-                </a:solidFill>
-                <a:latin typeface="Calibri"/>
-              </a:rPr>
-              <a:t>1</a:t>
-            </a:r>
-          </a:p>
-        </p:txBody>
-      </p:sp>
-      <p:sp>
-        <p:nvSpPr>
-          <p:cNvPr id="6" name="Rounded Rectangle 5"/>
-          <p:cNvSpPr/>
-          <p:nvPr/>
-        </p:nvSpPr>
-        <p:spPr>
-          <a:xfrm>
-            <a:off x="2011680" y="1440180"/>
-            <a:ext cx="9144000" cy="777240"/>
-          </a:xfrm>
-          <a:prstGeom prst="roundRect">
-            <a:avLst>
-              <a:gd name="adj" fmla="val 8000"/>
-            </a:avLst>
-          </a:prstGeom>
-          <a:solidFill>
-            <a:srgbClr val="FBFBFD"/>
-          </a:solidFill>
-          <a:ln w="19050">
-            <a:solidFill>
-              <a:srgbClr val="00A0B0"/>
-            </a:solidFill>
-          </a:ln>
-        </p:spPr>
-        <p:style>
-          <a:lnRef idx="1">
-            <a:schemeClr val="accent1"/>
-          </a:lnRef>
-          <a:fillRef idx="3">
-            <a:schemeClr val="accent1"/>
-          </a:fillRef>
-          <a:effectRef idx="2">
-            <a:schemeClr val="accent1"/>
-          </a:effectRef>
-          <a:fontRef idx="minor">
-            <a:schemeClr val="lt1"/>
-          </a:fontRef>
-        </p:style>
-        <p:txBody>
-          <a:bodyPr rtlCol="0" anchor="ctr"/>
-          <a:lstStyle/>
-          <a:p>
-            <a:pPr algn="ctr"/>
-          </a:p>
-        </p:txBody>
-      </p:sp>
-      <p:sp>
-        <p:nvSpPr>
-          <p:cNvPr id="7" name="TextBox 6"/>
-          <p:cNvSpPr txBox="1"/>
-          <p:nvPr/>
-        </p:nvSpPr>
-        <p:spPr>
-          <a:xfrm>
-            <a:off x="2286000" y="1440180"/>
-            <a:ext cx="8686800" cy="777240"/>
-          </a:xfrm>
-          <a:prstGeom prst="rect">
-            <a:avLst/>
-          </a:prstGeom>
-          <a:noFill/>
-        </p:spPr>
-        <p:txBody>
-          <a:bodyPr wrap="square" lIns="45720" rIns="45720" tIns="18288" bIns="18288" anchor="ctr">
-            <a:spAutoFit/>
-          </a:bodyPr>
-          <a:lstStyle/>
-          <a:p>
-            <a:pPr algn="l"/>
-            <a:r>
-              <a:rPr sz="1800" b="0" i="0">
+            <a:pPr>
+              <a:lnSpc>
+                <a:spcPct val="150000"/>
+              </a:lnSpc>
+              <a:spcAft>
+                <a:spcPts val="400"/>
+              </a:spcAft>
+            </a:pPr>
+            <a:r>
+              <a:rPr sz="2000" b="1">
+                <a:solidFill>
+                  <a:srgbClr val="00A0B0"/>
+                </a:solidFill>
+                <a:latin typeface="Calibri"/>
+              </a:rPr>
+              <a:t>▸  </a:t>
+            </a:r>
+            <a:r>
+              <a:rPr sz="2000">
                 <a:solidFill>
                   <a:srgbClr val="1A1A2E"/>
                 </a:solidFill>
                 <a:latin typeface="Calibri"/>
               </a:rPr>
-              <a:t>SQLi è la #1 dal 2003: Equifax, Heartland, TalkTalk</a:t>
-            </a:r>
-          </a:p>
-        </p:txBody>
-      </p:sp>
-      <p:sp>
-        <p:nvSpPr>
-          <p:cNvPr id="8" name="Oval 7"/>
-          <p:cNvSpPr/>
-          <p:nvPr/>
-        </p:nvSpPr>
-        <p:spPr>
-          <a:xfrm>
-            <a:off x="914400" y="2354580"/>
-            <a:ext cx="777240" cy="777240"/>
-          </a:xfrm>
-          <a:prstGeom prst="ellipse">
-            <a:avLst/>
-          </a:prstGeom>
-          <a:solidFill>
-            <a:srgbClr val="00A0B0"/>
-          </a:solidFill>
-          <a:ln>
-            <a:noFill/>
-          </a:ln>
-        </p:spPr>
-        <p:style>
-          <a:lnRef idx="1">
-            <a:schemeClr val="accent1"/>
-          </a:lnRef>
-          <a:fillRef idx="3">
-            <a:schemeClr val="accent1"/>
-          </a:fillRef>
-          <a:effectRef idx="2">
-            <a:schemeClr val="accent1"/>
-          </a:effectRef>
-          <a:fontRef idx="minor">
-            <a:schemeClr val="lt1"/>
-          </a:fontRef>
-        </p:style>
-        <p:txBody>
-          <a:bodyPr rtlCol="0" anchor="ctr"/>
-          <a:lstStyle/>
-          <a:p>
-            <a:pPr algn="ctr"/>
-          </a:p>
-        </p:txBody>
-      </p:sp>
-      <p:sp>
-        <p:nvSpPr>
-          <p:cNvPr id="9" name="TextBox 8"/>
-          <p:cNvSpPr txBox="1"/>
-          <p:nvPr/>
-        </p:nvSpPr>
-        <p:spPr>
-          <a:xfrm>
-            <a:off x="914400" y="2354580"/>
-            <a:ext cx="777240" cy="777240"/>
-          </a:xfrm>
-          <a:prstGeom prst="rect">
-            <a:avLst/>
-          </a:prstGeom>
-          <a:noFill/>
-        </p:spPr>
-        <p:txBody>
-          <a:bodyPr wrap="square" lIns="45720" rIns="45720" tIns="18288" bIns="18288" anchor="ctr">
-            <a:spAutoFit/>
-          </a:bodyPr>
-          <a:lstStyle/>
-          <a:p>
-            <a:pPr algn="ctr"/>
-            <a:r>
-              <a:rPr sz="2800" b="1" i="0">
-                <a:solidFill>
-                  <a:srgbClr val="FFFFFF"/>
-                </a:solidFill>
-                <a:latin typeface="Calibri"/>
-              </a:rPr>
-              <a:t>2</a:t>
-            </a:r>
-          </a:p>
-        </p:txBody>
-      </p:sp>
-      <p:sp>
-        <p:nvSpPr>
-          <p:cNvPr id="10" name="Rounded Rectangle 9"/>
-          <p:cNvSpPr/>
-          <p:nvPr/>
-        </p:nvSpPr>
-        <p:spPr>
-          <a:xfrm>
-            <a:off x="2011680" y="2354580"/>
-            <a:ext cx="9144000" cy="777240"/>
-          </a:xfrm>
-          <a:prstGeom prst="roundRect">
-            <a:avLst>
-              <a:gd name="adj" fmla="val 8000"/>
-            </a:avLst>
-          </a:prstGeom>
-          <a:solidFill>
-            <a:srgbClr val="FBFBFD"/>
-          </a:solidFill>
-          <a:ln w="19050">
-            <a:solidFill>
-              <a:srgbClr val="00A0B0"/>
-            </a:solidFill>
-          </a:ln>
-        </p:spPr>
-        <p:style>
-          <a:lnRef idx="1">
-            <a:schemeClr val="accent1"/>
-          </a:lnRef>
-          <a:fillRef idx="3">
-            <a:schemeClr val="accent1"/>
-          </a:fillRef>
-          <a:effectRef idx="2">
-            <a:schemeClr val="accent1"/>
-          </a:effectRef>
-          <a:fontRef idx="minor">
-            <a:schemeClr val="lt1"/>
-          </a:fontRef>
-        </p:style>
-        <p:txBody>
-          <a:bodyPr rtlCol="0" anchor="ctr"/>
-          <a:lstStyle/>
-          <a:p>
-            <a:pPr algn="ctr"/>
-          </a:p>
-        </p:txBody>
-      </p:sp>
-      <p:sp>
-        <p:nvSpPr>
-          <p:cNvPr id="11" name="TextBox 10"/>
-          <p:cNvSpPr txBox="1"/>
-          <p:nvPr/>
-        </p:nvSpPr>
-        <p:spPr>
-          <a:xfrm>
-            <a:off x="2286000" y="2354580"/>
-            <a:ext cx="8686800" cy="777240"/>
-          </a:xfrm>
-          <a:prstGeom prst="rect">
-            <a:avLst/>
-          </a:prstGeom>
-          <a:noFill/>
-        </p:spPr>
-        <p:txBody>
-          <a:bodyPr wrap="square" lIns="45720" rIns="45720" tIns="18288" bIns="18288" anchor="ctr">
-            <a:spAutoFit/>
-          </a:bodyPr>
-          <a:lstStyle/>
-          <a:p>
-            <a:pPr algn="l"/>
-            <a:r>
-              <a:rPr sz="1800" b="0" i="0">
+              <a:t>1. Query parametrizzate (difesa PRIMARIA, non sostituibile)</a:t>
+            </a:r>
+          </a:p>
+          <a:p>
+            <a:pPr>
+              <a:lnSpc>
+                <a:spcPct val="150000"/>
+              </a:lnSpc>
+              <a:spcAft>
+                <a:spcPts val="400"/>
+              </a:spcAft>
+            </a:pPr>
+            <a:r>
+              <a:rPr sz="2000" b="1">
+                <a:solidFill>
+                  <a:srgbClr val="00A0B0"/>
+                </a:solidFill>
+                <a:latin typeface="Calibri"/>
+              </a:rPr>
+              <a:t>▸  </a:t>
+            </a:r>
+            <a:r>
+              <a:rPr sz="2000">
                 <a:solidFill>
                   <a:srgbClr val="1A1A2E"/>
                 </a:solidFill>
                 <a:latin typeface="Calibri"/>
               </a:rPr>
-              <a:t>Mai f-string in SQL. Mai concatenazione. Sempre placeholder ?</a:t>
-            </a:r>
-          </a:p>
-        </p:txBody>
-      </p:sp>
-      <p:sp>
-        <p:nvSpPr>
-          <p:cNvPr id="12" name="Oval 11"/>
-          <p:cNvSpPr/>
-          <p:nvPr/>
-        </p:nvSpPr>
-        <p:spPr>
-          <a:xfrm>
-            <a:off x="914400" y="3268980"/>
-            <a:ext cx="777240" cy="777240"/>
-          </a:xfrm>
-          <a:prstGeom prst="ellipse">
-            <a:avLst/>
-          </a:prstGeom>
-          <a:solidFill>
-            <a:srgbClr val="00A0B0"/>
-          </a:solidFill>
-          <a:ln>
-            <a:noFill/>
-          </a:ln>
-        </p:spPr>
-        <p:style>
-          <a:lnRef idx="1">
-            <a:schemeClr val="accent1"/>
-          </a:lnRef>
-          <a:fillRef idx="3">
-            <a:schemeClr val="accent1"/>
-          </a:fillRef>
-          <a:effectRef idx="2">
-            <a:schemeClr val="accent1"/>
-          </a:effectRef>
-          <a:fontRef idx="minor">
-            <a:schemeClr val="lt1"/>
-          </a:fontRef>
-        </p:style>
-        <p:txBody>
-          <a:bodyPr rtlCol="0" anchor="ctr"/>
-          <a:lstStyle/>
-          <a:p>
-            <a:pPr algn="ctr"/>
-          </a:p>
-        </p:txBody>
-      </p:sp>
-      <p:sp>
-        <p:nvSpPr>
-          <p:cNvPr id="13" name="TextBox 12"/>
-          <p:cNvSpPr txBox="1"/>
-          <p:nvPr/>
-        </p:nvSpPr>
-        <p:spPr>
-          <a:xfrm>
-            <a:off x="914400" y="3268980"/>
-            <a:ext cx="777240" cy="777240"/>
-          </a:xfrm>
-          <a:prstGeom prst="rect">
-            <a:avLst/>
-          </a:prstGeom>
-          <a:noFill/>
-        </p:spPr>
-        <p:txBody>
-          <a:bodyPr wrap="square" lIns="45720" rIns="45720" tIns="18288" bIns="18288" anchor="ctr">
-            <a:spAutoFit/>
-          </a:bodyPr>
-          <a:lstStyle/>
-          <a:p>
-            <a:pPr algn="ctr"/>
-            <a:r>
-              <a:rPr sz="2800" b="1" i="0">
-                <a:solidFill>
-                  <a:srgbClr val="FFFFFF"/>
-                </a:solidFill>
-                <a:latin typeface="Calibri"/>
-              </a:rPr>
-              <a:t>3</a:t>
-            </a:r>
-          </a:p>
-        </p:txBody>
-      </p:sp>
-      <p:sp>
-        <p:nvSpPr>
-          <p:cNvPr id="14" name="Rounded Rectangle 13"/>
-          <p:cNvSpPr/>
-          <p:nvPr/>
-        </p:nvSpPr>
-        <p:spPr>
-          <a:xfrm>
-            <a:off x="2011680" y="3268980"/>
-            <a:ext cx="9144000" cy="777240"/>
-          </a:xfrm>
-          <a:prstGeom prst="roundRect">
-            <a:avLst>
-              <a:gd name="adj" fmla="val 8000"/>
-            </a:avLst>
-          </a:prstGeom>
-          <a:solidFill>
-            <a:srgbClr val="FBFBFD"/>
-          </a:solidFill>
-          <a:ln w="19050">
-            <a:solidFill>
-              <a:srgbClr val="00A0B0"/>
-            </a:solidFill>
-          </a:ln>
-        </p:spPr>
-        <p:style>
-          <a:lnRef idx="1">
-            <a:schemeClr val="accent1"/>
-          </a:lnRef>
-          <a:fillRef idx="3">
-            <a:schemeClr val="accent1"/>
-          </a:fillRef>
-          <a:effectRef idx="2">
-            <a:schemeClr val="accent1"/>
-          </a:effectRef>
-          <a:fontRef idx="minor">
-            <a:schemeClr val="lt1"/>
-          </a:fontRef>
-        </p:style>
-        <p:txBody>
-          <a:bodyPr rtlCol="0" anchor="ctr"/>
-          <a:lstStyle/>
-          <a:p>
-            <a:pPr algn="ctr"/>
-          </a:p>
-        </p:txBody>
-      </p:sp>
-      <p:sp>
-        <p:nvSpPr>
-          <p:cNvPr id="15" name="TextBox 14"/>
-          <p:cNvSpPr txBox="1"/>
-          <p:nvPr/>
-        </p:nvSpPr>
-        <p:spPr>
-          <a:xfrm>
-            <a:off x="2286000" y="3268980"/>
-            <a:ext cx="8686800" cy="777240"/>
-          </a:xfrm>
-          <a:prstGeom prst="rect">
-            <a:avLst/>
-          </a:prstGeom>
-          <a:noFill/>
-        </p:spPr>
-        <p:txBody>
-          <a:bodyPr wrap="square" lIns="45720" rIns="45720" tIns="18288" bIns="18288" anchor="ctr">
-            <a:spAutoFit/>
-          </a:bodyPr>
-          <a:lstStyle/>
-          <a:p>
-            <a:pPr algn="l"/>
-            <a:r>
-              <a:rPr sz="1800" b="0" i="0">
+              <a:t>2. ORM (forza il pattern corretto)</a:t>
+            </a:r>
+          </a:p>
+          <a:p>
+            <a:pPr>
+              <a:lnSpc>
+                <a:spcPct val="150000"/>
+              </a:lnSpc>
+              <a:spcAft>
+                <a:spcPts val="400"/>
+              </a:spcAft>
+            </a:pPr>
+            <a:r>
+              <a:rPr sz="2000" b="1">
+                <a:solidFill>
+                  <a:srgbClr val="00A0B0"/>
+                </a:solidFill>
+                <a:latin typeface="Calibri"/>
+              </a:rPr>
+              <a:t>▸  </a:t>
+            </a:r>
+            <a:r>
+              <a:rPr sz="2000">
                 <a:solidFill>
                   <a:srgbClr val="1A1A2E"/>
                 </a:solidFill>
                 <a:latin typeface="Calibri"/>
               </a:rPr>
-              <a:t>Filtrare gli apici è una strategia perdente</a:t>
-            </a:r>
-          </a:p>
-        </p:txBody>
-      </p:sp>
-      <p:sp>
-        <p:nvSpPr>
-          <p:cNvPr id="16" name="Oval 15"/>
-          <p:cNvSpPr/>
-          <p:nvPr/>
-        </p:nvSpPr>
-        <p:spPr>
-          <a:xfrm>
-            <a:off x="914400" y="4183380"/>
-            <a:ext cx="777240" cy="777240"/>
-          </a:xfrm>
-          <a:prstGeom prst="ellipse">
-            <a:avLst/>
-          </a:prstGeom>
-          <a:solidFill>
-            <a:srgbClr val="00A0B0"/>
-          </a:solidFill>
-          <a:ln>
-            <a:noFill/>
-          </a:ln>
-        </p:spPr>
-        <p:style>
-          <a:lnRef idx="1">
-            <a:schemeClr val="accent1"/>
-          </a:lnRef>
-          <a:fillRef idx="3">
-            <a:schemeClr val="accent1"/>
-          </a:fillRef>
-          <a:effectRef idx="2">
-            <a:schemeClr val="accent1"/>
-          </a:effectRef>
-          <a:fontRef idx="minor">
-            <a:schemeClr val="lt1"/>
-          </a:fontRef>
-        </p:style>
-        <p:txBody>
-          <a:bodyPr rtlCol="0" anchor="ctr"/>
-          <a:lstStyle/>
-          <a:p>
-            <a:pPr algn="ctr"/>
-          </a:p>
-        </p:txBody>
-      </p:sp>
-      <p:sp>
-        <p:nvSpPr>
-          <p:cNvPr id="17" name="TextBox 16"/>
-          <p:cNvSpPr txBox="1"/>
-          <p:nvPr/>
-        </p:nvSpPr>
-        <p:spPr>
-          <a:xfrm>
-            <a:off x="914400" y="4183380"/>
-            <a:ext cx="777240" cy="777240"/>
-          </a:xfrm>
-          <a:prstGeom prst="rect">
-            <a:avLst/>
-          </a:prstGeom>
-          <a:noFill/>
-        </p:spPr>
-        <p:txBody>
-          <a:bodyPr wrap="square" lIns="45720" rIns="45720" tIns="18288" bIns="18288" anchor="ctr">
-            <a:spAutoFit/>
-          </a:bodyPr>
-          <a:lstStyle/>
-          <a:p>
-            <a:pPr algn="ctr"/>
-            <a:r>
-              <a:rPr sz="2800" b="1" i="0">
-                <a:solidFill>
-                  <a:srgbClr val="FFFFFF"/>
-                </a:solidFill>
-                <a:latin typeface="Calibri"/>
-              </a:rPr>
-              <a:t>4</a:t>
-            </a:r>
-          </a:p>
-        </p:txBody>
-      </p:sp>
-      <p:sp>
-        <p:nvSpPr>
-          <p:cNvPr id="18" name="Rounded Rectangle 17"/>
-          <p:cNvSpPr/>
-          <p:nvPr/>
-        </p:nvSpPr>
-        <p:spPr>
-          <a:xfrm>
-            <a:off x="2011680" y="4183380"/>
-            <a:ext cx="9144000" cy="777240"/>
-          </a:xfrm>
-          <a:prstGeom prst="roundRect">
-            <a:avLst>
-              <a:gd name="adj" fmla="val 8000"/>
-            </a:avLst>
-          </a:prstGeom>
-          <a:solidFill>
-            <a:srgbClr val="FBFBFD"/>
-          </a:solidFill>
-          <a:ln w="19050">
-            <a:solidFill>
-              <a:srgbClr val="00A0B0"/>
-            </a:solidFill>
-          </a:ln>
-        </p:spPr>
-        <p:style>
-          <a:lnRef idx="1">
-            <a:schemeClr val="accent1"/>
-          </a:lnRef>
-          <a:fillRef idx="3">
-            <a:schemeClr val="accent1"/>
-          </a:fillRef>
-          <a:effectRef idx="2">
-            <a:schemeClr val="accent1"/>
-          </a:effectRef>
-          <a:fontRef idx="minor">
-            <a:schemeClr val="lt1"/>
-          </a:fontRef>
-        </p:style>
-        <p:txBody>
-          <a:bodyPr rtlCol="0" anchor="ctr"/>
-          <a:lstStyle/>
-          <a:p>
-            <a:pPr algn="ctr"/>
-          </a:p>
-        </p:txBody>
-      </p:sp>
-      <p:sp>
-        <p:nvSpPr>
-          <p:cNvPr id="19" name="TextBox 18"/>
-          <p:cNvSpPr txBox="1"/>
-          <p:nvPr/>
-        </p:nvSpPr>
-        <p:spPr>
-          <a:xfrm>
-            <a:off x="2286000" y="4183380"/>
-            <a:ext cx="8686800" cy="777240"/>
-          </a:xfrm>
-          <a:prstGeom prst="rect">
-            <a:avLst/>
-          </a:prstGeom>
-          <a:noFill/>
-        </p:spPr>
-        <p:txBody>
-          <a:bodyPr wrap="square" lIns="45720" rIns="45720" tIns="18288" bIns="18288" anchor="ctr">
-            <a:spAutoFit/>
-          </a:bodyPr>
-          <a:lstStyle/>
-          <a:p>
-            <a:pPr algn="l"/>
-            <a:r>
-              <a:rPr sz="1800" b="0" i="0">
+              <a:t>3. Least privilege per l'utente DB (no DROP/CREATE/GRANT)</a:t>
+            </a:r>
+          </a:p>
+          <a:p>
+            <a:pPr>
+              <a:lnSpc>
+                <a:spcPct val="150000"/>
+              </a:lnSpc>
+              <a:spcAft>
+                <a:spcPts val="400"/>
+              </a:spcAft>
+            </a:pPr>
+            <a:r>
+              <a:rPr sz="2000" b="1">
+                <a:solidFill>
+                  <a:srgbClr val="00A0B0"/>
+                </a:solidFill>
+                <a:latin typeface="Calibri"/>
+              </a:rPr>
+              <a:t>▸  </a:t>
+            </a:r>
+            <a:r>
+              <a:rPr sz="2000">
                 <a:solidFill>
                   <a:srgbClr val="1A1A2E"/>
                 </a:solidFill>
                 <a:latin typeface="Calibri"/>
               </a:rPr>
-              <a:t>ORM è più sicuro per default</a:t>
-            </a:r>
-          </a:p>
-        </p:txBody>
-      </p:sp>
-      <p:sp>
-        <p:nvSpPr>
-          <p:cNvPr id="20" name="Oval 19"/>
-          <p:cNvSpPr/>
-          <p:nvPr/>
-        </p:nvSpPr>
-        <p:spPr>
-          <a:xfrm>
-            <a:off x="914400" y="5097780"/>
-            <a:ext cx="777240" cy="777240"/>
-          </a:xfrm>
-          <a:prstGeom prst="ellipse">
-            <a:avLst/>
-          </a:prstGeom>
-          <a:solidFill>
-            <a:srgbClr val="00A0B0"/>
-          </a:solidFill>
-          <a:ln>
-            <a:noFill/>
-          </a:ln>
-        </p:spPr>
-        <p:style>
-          <a:lnRef idx="1">
-            <a:schemeClr val="accent1"/>
-          </a:lnRef>
-          <a:fillRef idx="3">
-            <a:schemeClr val="accent1"/>
-          </a:fillRef>
-          <a:effectRef idx="2">
-            <a:schemeClr val="accent1"/>
-          </a:effectRef>
-          <a:fontRef idx="minor">
-            <a:schemeClr val="lt1"/>
-          </a:fontRef>
-        </p:style>
-        <p:txBody>
-          <a:bodyPr rtlCol="0" anchor="ctr"/>
-          <a:lstStyle/>
-          <a:p>
-            <a:pPr algn="ctr"/>
-          </a:p>
-        </p:txBody>
-      </p:sp>
-      <p:sp>
-        <p:nvSpPr>
-          <p:cNvPr id="21" name="TextBox 20"/>
-          <p:cNvSpPr txBox="1"/>
-          <p:nvPr/>
-        </p:nvSpPr>
-        <p:spPr>
-          <a:xfrm>
-            <a:off x="914400" y="5097780"/>
-            <a:ext cx="777240" cy="777240"/>
-          </a:xfrm>
-          <a:prstGeom prst="rect">
-            <a:avLst/>
-          </a:prstGeom>
-          <a:noFill/>
-        </p:spPr>
-        <p:txBody>
-          <a:bodyPr wrap="square" lIns="45720" rIns="45720" tIns="18288" bIns="18288" anchor="ctr">
-            <a:spAutoFit/>
-          </a:bodyPr>
-          <a:lstStyle/>
-          <a:p>
-            <a:pPr algn="ctr"/>
-            <a:r>
-              <a:rPr sz="2800" b="1" i="0">
-                <a:solidFill>
-                  <a:srgbClr val="FFFFFF"/>
-                </a:solidFill>
-                <a:latin typeface="Calibri"/>
-              </a:rPr>
-              <a:t>5</a:t>
-            </a:r>
-          </a:p>
-        </p:txBody>
-      </p:sp>
-      <p:sp>
-        <p:nvSpPr>
-          <p:cNvPr id="22" name="Rounded Rectangle 21"/>
-          <p:cNvSpPr/>
-          <p:nvPr/>
-        </p:nvSpPr>
-        <p:spPr>
-          <a:xfrm>
-            <a:off x="2011680" y="5097780"/>
-            <a:ext cx="9144000" cy="777240"/>
-          </a:xfrm>
-          <a:prstGeom prst="roundRect">
-            <a:avLst>
-              <a:gd name="adj" fmla="val 8000"/>
-            </a:avLst>
-          </a:prstGeom>
-          <a:solidFill>
-            <a:srgbClr val="FBFBFD"/>
-          </a:solidFill>
-          <a:ln w="19050">
-            <a:solidFill>
-              <a:srgbClr val="00A0B0"/>
-            </a:solidFill>
-          </a:ln>
-        </p:spPr>
-        <p:style>
-          <a:lnRef idx="1">
-            <a:schemeClr val="accent1"/>
-          </a:lnRef>
-          <a:fillRef idx="3">
-            <a:schemeClr val="accent1"/>
-          </a:fillRef>
-          <a:effectRef idx="2">
-            <a:schemeClr val="accent1"/>
-          </a:effectRef>
-          <a:fontRef idx="minor">
-            <a:schemeClr val="lt1"/>
-          </a:fontRef>
-        </p:style>
-        <p:txBody>
-          <a:bodyPr rtlCol="0" anchor="ctr"/>
-          <a:lstStyle/>
-          <a:p>
-            <a:pPr algn="ctr"/>
-          </a:p>
-        </p:txBody>
-      </p:sp>
-      <p:sp>
-        <p:nvSpPr>
-          <p:cNvPr id="23" name="TextBox 22"/>
-          <p:cNvSpPr txBox="1"/>
-          <p:nvPr/>
-        </p:nvSpPr>
-        <p:spPr>
-          <a:xfrm>
-            <a:off x="2286000" y="5097780"/>
-            <a:ext cx="8686800" cy="777240"/>
-          </a:xfrm>
-          <a:prstGeom prst="rect">
-            <a:avLst/>
-          </a:prstGeom>
-          <a:noFill/>
-        </p:spPr>
-        <p:txBody>
-          <a:bodyPr wrap="square" lIns="45720" rIns="45720" tIns="18288" bIns="18288" anchor="ctr">
-            <a:spAutoFit/>
-          </a:bodyPr>
-          <a:lstStyle/>
-          <a:p>
-            <a:pPr algn="l"/>
-            <a:r>
-              <a:rPr sz="1800" b="0" i="0">
+              <a:t>4. Errori generici al client, dettagli nei log interni</a:t>
+            </a:r>
+          </a:p>
+          <a:p>
+            <a:pPr>
+              <a:lnSpc>
+                <a:spcPct val="150000"/>
+              </a:lnSpc>
+              <a:spcAft>
+                <a:spcPts val="400"/>
+              </a:spcAft>
+            </a:pPr>
+            <a:r>
+              <a:rPr sz="2000" b="1">
+                <a:solidFill>
+                  <a:srgbClr val="00A0B0"/>
+                </a:solidFill>
+                <a:latin typeface="Calibri"/>
+              </a:rPr>
+              <a:t>▸  </a:t>
+            </a:r>
+            <a:r>
+              <a:rPr sz="2000">
                 <a:solidFill>
                   <a:srgbClr val="1A1A2E"/>
                 </a:solidFill>
                 <a:latin typeface="Calibri"/>
               </a:rPr>
-              <a:t>Difese stratificate: 7 livelli di protezione</a:t>
+              <a:t>5. WAF (Web Application Firewall) come strato aggiuntivo</a:t>
+            </a:r>
+          </a:p>
+          <a:p>
+            <a:pPr>
+              <a:lnSpc>
+                <a:spcPct val="150000"/>
+              </a:lnSpc>
+              <a:spcAft>
+                <a:spcPts val="400"/>
+              </a:spcAft>
+            </a:pPr>
+            <a:r>
+              <a:rPr sz="2000" b="1">
+                <a:solidFill>
+                  <a:srgbClr val="00A0B0"/>
+                </a:solidFill>
+                <a:latin typeface="Calibri"/>
+              </a:rPr>
+              <a:t>▸  </a:t>
+            </a:r>
+            <a:r>
+              <a:rPr sz="2000">
+                <a:solidFill>
+                  <a:srgbClr val="1A1A2E"/>
+                </a:solidFill>
+                <a:latin typeface="Calibri"/>
+              </a:rPr>
+              <a:t>6. Rate limiting sul login (anti brute force)</a:t>
+            </a:r>
+          </a:p>
+          <a:p>
+            <a:pPr>
+              <a:lnSpc>
+                <a:spcPct val="150000"/>
+              </a:lnSpc>
+              <a:spcAft>
+                <a:spcPts val="400"/>
+              </a:spcAft>
+            </a:pPr>
+            <a:r>
+              <a:rPr sz="2000" b="1">
+                <a:solidFill>
+                  <a:srgbClr val="00A0B0"/>
+                </a:solidFill>
+                <a:latin typeface="Calibri"/>
+              </a:rPr>
+              <a:t>▸  </a:t>
+            </a:r>
+            <a:r>
+              <a:rPr sz="2000">
+                <a:solidFill>
+                  <a:srgbClr val="1A1A2E"/>
+                </a:solidFill>
+                <a:latin typeface="Calibri"/>
+              </a:rPr>
+              <a:t>7. Audit log dei tentativi sospetti</a:t>
             </a:r>
           </a:p>
         </p:txBody>
       </p:sp>
       <p:cxnSp>
         <p:nvCxnSpPr>
-          <p:cNvPr id="24" name="Connector 23"/>
+          <p:cNvPr id="5" name="Connector 4"/>
           <p:cNvCxnSpPr/>
           <p:nvPr/>
         </p:nvCxnSpPr>
@@ -5483,7 +5516,7 @@
       </p:cxnSp>
       <p:sp>
         <p:nvSpPr>
-          <p:cNvPr id="25" name="TextBox 24"/>
+          <p:cNvPr id="6" name="TextBox 5"/>
           <p:cNvSpPr txBox="1"/>
           <p:nvPr/>
         </p:nvSpPr>
@@ -5518,7 +5551,7 @@
       </p:sp>
       <p:sp>
         <p:nvSpPr>
-          <p:cNvPr id="26" name="TextBox 25"/>
+          <p:cNvPr id="7" name="TextBox 6"/>
           <p:cNvSpPr txBox="1"/>
           <p:nvPr/>
         </p:nvSpPr>
@@ -5546,7 +5579,7 @@
                 </a:solidFill>
                 <a:latin typeface="Calibri"/>
               </a:rPr>
-              <a:t>L3  ·  12/14</a:t>
+              <a:t>L3  ·  12/15</a:t>
             </a:r>
           </a:p>
         </p:txBody>
@@ -5578,13 +5611,13 @@
         <p:spPr>
           <a:xfrm>
             <a:off x="0" y="0"/>
-            <a:ext cx="4114800" cy="6858000"/>
+            <a:ext cx="12191695" cy="777240"/>
           </a:xfrm>
           <a:prstGeom prst="rect">
             <a:avLst/>
           </a:prstGeom>
           <a:solidFill>
-            <a:srgbClr val="081B33"/>
+            <a:srgbClr val="0F2D52"/>
           </a:solidFill>
           <a:ln>
             <a:noFill/>
@@ -5614,59 +5647,51 @@
       </p:sp>
       <p:sp>
         <p:nvSpPr>
-          <p:cNvPr id="3" name="Rectangle 2"/>
+          <p:cNvPr id="3" name="TextBox 2"/>
+          <p:cNvSpPr txBox="1"/>
+          <p:nvPr/>
+        </p:nvSpPr>
+        <p:spPr>
+          <a:xfrm>
+            <a:off x="457200" y="164592"/>
+            <a:ext cx="10972800" cy="502920"/>
+          </a:xfrm>
+          <a:prstGeom prst="rect">
+            <a:avLst/>
+          </a:prstGeom>
+          <a:noFill/>
+        </p:spPr>
+        <p:txBody>
+          <a:bodyPr wrap="square" lIns="45720" rIns="45720" tIns="18288" bIns="18288" anchor="ctr">
+            <a:spAutoFit/>
+          </a:bodyPr>
+          <a:lstStyle/>
+          <a:p>
+            <a:pPr algn="l"/>
+            <a:r>
+              <a:rPr sz="2400" b="1" i="0">
+                <a:solidFill>
+                  <a:srgbClr val="FFFFFF"/>
+                </a:solidFill>
+                <a:latin typeface="Calibri"/>
+              </a:rPr>
+              <a:t>📌  Cosa portare a casa</a:t>
+            </a:r>
+          </a:p>
+        </p:txBody>
+      </p:sp>
+      <p:sp>
+        <p:nvSpPr>
+          <p:cNvPr id="4" name="Oval 3"/>
           <p:cNvSpPr/>
           <p:nvPr/>
         </p:nvSpPr>
         <p:spPr>
           <a:xfrm>
-            <a:off x="4114800" y="0"/>
-            <a:ext cx="8046720" cy="6858000"/>
-          </a:xfrm>
-          <a:prstGeom prst="rect">
-            <a:avLst/>
-          </a:prstGeom>
-          <a:solidFill>
-            <a:srgbClr val="F1F4F8"/>
-          </a:solidFill>
-          <a:ln>
-            <a:noFill/>
-          </a:ln>
-        </p:spPr>
-        <p:style>
-          <a:lnRef idx="1">
-            <a:schemeClr val="accent1"/>
-          </a:lnRef>
-          <a:fillRef idx="3">
-            <a:schemeClr val="accent1"/>
-          </a:fillRef>
-          <a:effectRef idx="2">
-            <a:schemeClr val="accent1"/>
-          </a:effectRef>
-          <a:fontRef idx="minor">
-            <a:schemeClr val="lt1"/>
-          </a:fontRef>
-        </p:style>
-        <p:txBody>
-          <a:bodyPr rtlCol="0" anchor="ctr"/>
-          <a:lstStyle/>
-          <a:p>
-            <a:pPr algn="ctr"/>
-          </a:p>
-        </p:txBody>
-      </p:sp>
-      <p:sp>
-        <p:nvSpPr>
-          <p:cNvPr id="4" name="Rectangle 3"/>
-          <p:cNvSpPr/>
-          <p:nvPr/>
-        </p:nvSpPr>
-        <p:spPr>
-          <a:xfrm>
-            <a:off x="4114800" y="0"/>
-            <a:ext cx="137160" cy="6858000"/>
-          </a:xfrm>
-          <a:prstGeom prst="rect">
+            <a:off x="914400" y="1440180"/>
+            <a:ext cx="777240" cy="777240"/>
+          </a:xfrm>
+          <a:prstGeom prst="ellipse">
             <a:avLst/>
           </a:prstGeom>
           <a:solidFill>
@@ -5706,8 +5731,8 @@
         </p:nvSpPr>
         <p:spPr>
           <a:xfrm>
-            <a:off x="274320" y="2103120"/>
-            <a:ext cx="3657600" cy="2286000"/>
+            <a:off x="914400" y="1440180"/>
+            <a:ext cx="777240" cy="777240"/>
           </a:xfrm>
           <a:prstGeom prst="rect">
             <a:avLst/>
@@ -5715,34 +5740,81 @@
           <a:noFill/>
         </p:spPr>
         <p:txBody>
-          <a:bodyPr wrap="square" lIns="45720" rIns="45720" tIns="18288" bIns="18288" anchor="t">
+          <a:bodyPr wrap="square" lIns="45720" rIns="45720" tIns="18288" bIns="18288" anchor="ctr">
             <a:spAutoFit/>
           </a:bodyPr>
           <a:lstStyle/>
           <a:p>
             <a:pPr algn="ctr"/>
             <a:r>
-              <a:rPr sz="17000" b="1" i="0">
-                <a:solidFill>
-                  <a:srgbClr val="00A0B0"/>
-                </a:solidFill>
-                <a:latin typeface="Calibri"/>
-              </a:rPr>
-              <a:t>03</a:t>
-            </a:r>
-          </a:p>
-        </p:txBody>
-      </p:sp>
-      <p:sp>
-        <p:nvSpPr>
-          <p:cNvPr id="6" name="TextBox 5"/>
+              <a:rPr sz="2800" b="1" i="0">
+                <a:solidFill>
+                  <a:srgbClr val="FFFFFF"/>
+                </a:solidFill>
+                <a:latin typeface="Calibri"/>
+              </a:rPr>
+              <a:t>1</a:t>
+            </a:r>
+          </a:p>
+        </p:txBody>
+      </p:sp>
+      <p:sp>
+        <p:nvSpPr>
+          <p:cNvPr id="6" name="Rounded Rectangle 5"/>
+          <p:cNvSpPr/>
+          <p:nvPr/>
+        </p:nvSpPr>
+        <p:spPr>
+          <a:xfrm>
+            <a:off x="2011680" y="1440180"/>
+            <a:ext cx="9144000" cy="777240"/>
+          </a:xfrm>
+          <a:prstGeom prst="roundRect">
+            <a:avLst>
+              <a:gd name="adj" fmla="val 8000"/>
+            </a:avLst>
+          </a:prstGeom>
+          <a:solidFill>
+            <a:srgbClr val="FBFBFD"/>
+          </a:solidFill>
+          <a:ln w="19050">
+            <a:solidFill>
+              <a:srgbClr val="00A0B0"/>
+            </a:solidFill>
+          </a:ln>
+        </p:spPr>
+        <p:style>
+          <a:lnRef idx="1">
+            <a:schemeClr val="accent1"/>
+          </a:lnRef>
+          <a:fillRef idx="3">
+            <a:schemeClr val="accent1"/>
+          </a:fillRef>
+          <a:effectRef idx="2">
+            <a:schemeClr val="accent1"/>
+          </a:effectRef>
+          <a:fontRef idx="minor">
+            <a:schemeClr val="lt1"/>
+          </a:fontRef>
+        </p:style>
+        <p:txBody>
+          <a:bodyPr rtlCol="0" anchor="ctr"/>
+          <a:lstStyle/>
+          <a:p>
+            <a:pPr algn="ctr"/>
+          </a:p>
+        </p:txBody>
+      </p:sp>
+      <p:sp>
+        <p:nvSpPr>
+          <p:cNvPr id="7" name="TextBox 6"/>
           <p:cNvSpPr txBox="1"/>
           <p:nvPr/>
         </p:nvSpPr>
         <p:spPr>
           <a:xfrm>
-            <a:off x="274320" y="4572000"/>
-            <a:ext cx="3657600" cy="457200"/>
+            <a:off x="2286000" y="1440180"/>
+            <a:ext cx="8686800" cy="777240"/>
           </a:xfrm>
           <a:prstGeom prst="rect">
             <a:avLst/>
@@ -5750,34 +5822,77 @@
           <a:noFill/>
         </p:spPr>
         <p:txBody>
-          <a:bodyPr wrap="square" lIns="45720" rIns="45720" tIns="18288" bIns="18288" anchor="t">
+          <a:bodyPr wrap="square" lIns="45720" rIns="45720" tIns="18288" bIns="18288" anchor="ctr">
             <a:spAutoFit/>
           </a:bodyPr>
           <a:lstStyle/>
           <a:p>
+            <a:pPr algn="l"/>
+            <a:r>
+              <a:rPr sz="1800" b="0" i="0">
+                <a:solidFill>
+                  <a:srgbClr val="1A1A2E"/>
+                </a:solidFill>
+                <a:latin typeface="Calibri"/>
+              </a:rPr>
+              <a:t>SQLi è la #1 dal 2003: Equifax, Heartland, TalkTalk</a:t>
+            </a:r>
+          </a:p>
+        </p:txBody>
+      </p:sp>
+      <p:sp>
+        <p:nvSpPr>
+          <p:cNvPr id="8" name="Oval 7"/>
+          <p:cNvSpPr/>
+          <p:nvPr/>
+        </p:nvSpPr>
+        <p:spPr>
+          <a:xfrm>
+            <a:off x="914400" y="2354580"/>
+            <a:ext cx="777240" cy="777240"/>
+          </a:xfrm>
+          <a:prstGeom prst="ellipse">
+            <a:avLst/>
+          </a:prstGeom>
+          <a:solidFill>
+            <a:srgbClr val="00A0B0"/>
+          </a:solidFill>
+          <a:ln>
+            <a:noFill/>
+          </a:ln>
+        </p:spPr>
+        <p:style>
+          <a:lnRef idx="1">
+            <a:schemeClr val="accent1"/>
+          </a:lnRef>
+          <a:fillRef idx="3">
+            <a:schemeClr val="accent1"/>
+          </a:fillRef>
+          <a:effectRef idx="2">
+            <a:schemeClr val="accent1"/>
+          </a:effectRef>
+          <a:fontRef idx="minor">
+            <a:schemeClr val="lt1"/>
+          </a:fontRef>
+        </p:style>
+        <p:txBody>
+          <a:bodyPr rtlCol="0" anchor="ctr"/>
+          <a:lstStyle/>
+          <a:p>
             <a:pPr algn="ctr"/>
-            <a:r>
-              <a:rPr sz="2000" b="1" i="0">
-                <a:solidFill>
-                  <a:srgbClr val="6FD8E0"/>
-                </a:solidFill>
-                <a:latin typeface="Calibri"/>
-              </a:rPr>
-              <a:t>PARTE</a:t>
-            </a:r>
-          </a:p>
-        </p:txBody>
-      </p:sp>
-      <p:sp>
-        <p:nvSpPr>
-          <p:cNvPr id="7" name="TextBox 6"/>
+          </a:p>
+        </p:txBody>
+      </p:sp>
+      <p:sp>
+        <p:nvSpPr>
+          <p:cNvPr id="9" name="TextBox 8"/>
           <p:cNvSpPr txBox="1"/>
           <p:nvPr/>
         </p:nvSpPr>
         <p:spPr>
           <a:xfrm>
-            <a:off x="4572000" y="2286000"/>
-            <a:ext cx="7315200" cy="1645920"/>
+            <a:off x="914400" y="2354580"/>
+            <a:ext cx="777240" cy="777240"/>
           </a:xfrm>
           <a:prstGeom prst="rect">
             <a:avLst/>
@@ -5785,34 +5900,81 @@
           <a:noFill/>
         </p:spPr>
         <p:txBody>
-          <a:bodyPr wrap="square" lIns="45720" rIns="45720" tIns="18288" bIns="18288" anchor="t">
+          <a:bodyPr wrap="square" lIns="45720" rIns="45720" tIns="18288" bIns="18288" anchor="ctr">
             <a:spAutoFit/>
           </a:bodyPr>
           <a:lstStyle/>
           <a:p>
-            <a:pPr algn="l"/>
-            <a:r>
-              <a:rPr sz="4400" b="1" i="0">
-                <a:solidFill>
-                  <a:srgbClr val="0F2D52"/>
-                </a:solidFill>
-                <a:latin typeface="Calibri"/>
-              </a:rPr>
-              <a:t>Laboratorio</a:t>
-            </a:r>
-          </a:p>
-        </p:txBody>
-      </p:sp>
-      <p:sp>
-        <p:nvSpPr>
-          <p:cNvPr id="8" name="TextBox 7"/>
+            <a:pPr algn="ctr"/>
+            <a:r>
+              <a:rPr sz="2800" b="1" i="0">
+                <a:solidFill>
+                  <a:srgbClr val="FFFFFF"/>
+                </a:solidFill>
+                <a:latin typeface="Calibri"/>
+              </a:rPr>
+              <a:t>2</a:t>
+            </a:r>
+          </a:p>
+        </p:txBody>
+      </p:sp>
+      <p:sp>
+        <p:nvSpPr>
+          <p:cNvPr id="10" name="Rounded Rectangle 9"/>
+          <p:cNvSpPr/>
+          <p:nvPr/>
+        </p:nvSpPr>
+        <p:spPr>
+          <a:xfrm>
+            <a:off x="2011680" y="2354580"/>
+            <a:ext cx="9144000" cy="777240"/>
+          </a:xfrm>
+          <a:prstGeom prst="roundRect">
+            <a:avLst>
+              <a:gd name="adj" fmla="val 8000"/>
+            </a:avLst>
+          </a:prstGeom>
+          <a:solidFill>
+            <a:srgbClr val="FBFBFD"/>
+          </a:solidFill>
+          <a:ln w="19050">
+            <a:solidFill>
+              <a:srgbClr val="00A0B0"/>
+            </a:solidFill>
+          </a:ln>
+        </p:spPr>
+        <p:style>
+          <a:lnRef idx="1">
+            <a:schemeClr val="accent1"/>
+          </a:lnRef>
+          <a:fillRef idx="3">
+            <a:schemeClr val="accent1"/>
+          </a:fillRef>
+          <a:effectRef idx="2">
+            <a:schemeClr val="accent1"/>
+          </a:effectRef>
+          <a:fontRef idx="minor">
+            <a:schemeClr val="lt1"/>
+          </a:fontRef>
+        </p:style>
+        <p:txBody>
+          <a:bodyPr rtlCol="0" anchor="ctr"/>
+          <a:lstStyle/>
+          <a:p>
+            <a:pPr algn="ctr"/>
+          </a:p>
+        </p:txBody>
+      </p:sp>
+      <p:sp>
+        <p:nvSpPr>
+          <p:cNvPr id="11" name="TextBox 10"/>
           <p:cNvSpPr txBox="1"/>
           <p:nvPr/>
         </p:nvSpPr>
         <p:spPr>
           <a:xfrm>
-            <a:off x="4572000" y="3931920"/>
-            <a:ext cx="7315200" cy="1828800"/>
+            <a:off x="2286000" y="2354580"/>
+            <a:ext cx="8686800" cy="777240"/>
           </a:xfrm>
           <a:prstGeom prst="rect">
             <a:avLst/>
@@ -5820,27 +5982,507 @@
           <a:noFill/>
         </p:spPr>
         <p:txBody>
-          <a:bodyPr wrap="square" lIns="45720" rIns="45720" tIns="18288" bIns="18288" anchor="t">
+          <a:bodyPr wrap="square" lIns="45720" rIns="45720" tIns="18288" bIns="18288" anchor="ctr">
             <a:spAutoFit/>
           </a:bodyPr>
           <a:lstStyle/>
           <a:p>
             <a:pPr algn="l"/>
             <a:r>
-              <a:rPr sz="1800" b="0" i="1">
-                <a:solidFill>
-                  <a:srgbClr val="6B7280"/>
-                </a:solidFill>
-                <a:latin typeface="Calibri"/>
-              </a:rPr>
-              <a:t>Mini-banca: app vulnerabile → la sfrutti → la correggi</a:t>
+              <a:rPr sz="1800" b="0" i="0">
+                <a:solidFill>
+                  <a:srgbClr val="1A1A2E"/>
+                </a:solidFill>
+                <a:latin typeface="Calibri"/>
+              </a:rPr>
+              <a:t>Mai f-string in SQL. Mai concatenazione. Sempre placeholder ?</a:t>
+            </a:r>
+          </a:p>
+        </p:txBody>
+      </p:sp>
+      <p:sp>
+        <p:nvSpPr>
+          <p:cNvPr id="12" name="Oval 11"/>
+          <p:cNvSpPr/>
+          <p:nvPr/>
+        </p:nvSpPr>
+        <p:spPr>
+          <a:xfrm>
+            <a:off x="914400" y="3268980"/>
+            <a:ext cx="777240" cy="777240"/>
+          </a:xfrm>
+          <a:prstGeom prst="ellipse">
+            <a:avLst/>
+          </a:prstGeom>
+          <a:solidFill>
+            <a:srgbClr val="00A0B0"/>
+          </a:solidFill>
+          <a:ln>
+            <a:noFill/>
+          </a:ln>
+        </p:spPr>
+        <p:style>
+          <a:lnRef idx="1">
+            <a:schemeClr val="accent1"/>
+          </a:lnRef>
+          <a:fillRef idx="3">
+            <a:schemeClr val="accent1"/>
+          </a:fillRef>
+          <a:effectRef idx="2">
+            <a:schemeClr val="accent1"/>
+          </a:effectRef>
+          <a:fontRef idx="minor">
+            <a:schemeClr val="lt1"/>
+          </a:fontRef>
+        </p:style>
+        <p:txBody>
+          <a:bodyPr rtlCol="0" anchor="ctr"/>
+          <a:lstStyle/>
+          <a:p>
+            <a:pPr algn="ctr"/>
+          </a:p>
+        </p:txBody>
+      </p:sp>
+      <p:sp>
+        <p:nvSpPr>
+          <p:cNvPr id="13" name="TextBox 12"/>
+          <p:cNvSpPr txBox="1"/>
+          <p:nvPr/>
+        </p:nvSpPr>
+        <p:spPr>
+          <a:xfrm>
+            <a:off x="914400" y="3268980"/>
+            <a:ext cx="777240" cy="777240"/>
+          </a:xfrm>
+          <a:prstGeom prst="rect">
+            <a:avLst/>
+          </a:prstGeom>
+          <a:noFill/>
+        </p:spPr>
+        <p:txBody>
+          <a:bodyPr wrap="square" lIns="45720" rIns="45720" tIns="18288" bIns="18288" anchor="ctr">
+            <a:spAutoFit/>
+          </a:bodyPr>
+          <a:lstStyle/>
+          <a:p>
+            <a:pPr algn="ctr"/>
+            <a:r>
+              <a:rPr sz="2800" b="1" i="0">
+                <a:solidFill>
+                  <a:srgbClr val="FFFFFF"/>
+                </a:solidFill>
+                <a:latin typeface="Calibri"/>
+              </a:rPr>
+              <a:t>3</a:t>
+            </a:r>
+          </a:p>
+        </p:txBody>
+      </p:sp>
+      <p:sp>
+        <p:nvSpPr>
+          <p:cNvPr id="14" name="Rounded Rectangle 13"/>
+          <p:cNvSpPr/>
+          <p:nvPr/>
+        </p:nvSpPr>
+        <p:spPr>
+          <a:xfrm>
+            <a:off x="2011680" y="3268980"/>
+            <a:ext cx="9144000" cy="777240"/>
+          </a:xfrm>
+          <a:prstGeom prst="roundRect">
+            <a:avLst>
+              <a:gd name="adj" fmla="val 8000"/>
+            </a:avLst>
+          </a:prstGeom>
+          <a:solidFill>
+            <a:srgbClr val="FBFBFD"/>
+          </a:solidFill>
+          <a:ln w="19050">
+            <a:solidFill>
+              <a:srgbClr val="00A0B0"/>
+            </a:solidFill>
+          </a:ln>
+        </p:spPr>
+        <p:style>
+          <a:lnRef idx="1">
+            <a:schemeClr val="accent1"/>
+          </a:lnRef>
+          <a:fillRef idx="3">
+            <a:schemeClr val="accent1"/>
+          </a:fillRef>
+          <a:effectRef idx="2">
+            <a:schemeClr val="accent1"/>
+          </a:effectRef>
+          <a:fontRef idx="minor">
+            <a:schemeClr val="lt1"/>
+          </a:fontRef>
+        </p:style>
+        <p:txBody>
+          <a:bodyPr rtlCol="0" anchor="ctr"/>
+          <a:lstStyle/>
+          <a:p>
+            <a:pPr algn="ctr"/>
+          </a:p>
+        </p:txBody>
+      </p:sp>
+      <p:sp>
+        <p:nvSpPr>
+          <p:cNvPr id="15" name="TextBox 14"/>
+          <p:cNvSpPr txBox="1"/>
+          <p:nvPr/>
+        </p:nvSpPr>
+        <p:spPr>
+          <a:xfrm>
+            <a:off x="2286000" y="3268980"/>
+            <a:ext cx="8686800" cy="777240"/>
+          </a:xfrm>
+          <a:prstGeom prst="rect">
+            <a:avLst/>
+          </a:prstGeom>
+          <a:noFill/>
+        </p:spPr>
+        <p:txBody>
+          <a:bodyPr wrap="square" lIns="45720" rIns="45720" tIns="18288" bIns="18288" anchor="ctr">
+            <a:spAutoFit/>
+          </a:bodyPr>
+          <a:lstStyle/>
+          <a:p>
+            <a:pPr algn="l"/>
+            <a:r>
+              <a:rPr sz="1800" b="0" i="0">
+                <a:solidFill>
+                  <a:srgbClr val="1A1A2E"/>
+                </a:solidFill>
+                <a:latin typeface="Calibri"/>
+              </a:rPr>
+              <a:t>Filtrare gli apici è una strategia perdente</a:t>
+            </a:r>
+          </a:p>
+        </p:txBody>
+      </p:sp>
+      <p:sp>
+        <p:nvSpPr>
+          <p:cNvPr id="16" name="Oval 15"/>
+          <p:cNvSpPr/>
+          <p:nvPr/>
+        </p:nvSpPr>
+        <p:spPr>
+          <a:xfrm>
+            <a:off x="914400" y="4183380"/>
+            <a:ext cx="777240" cy="777240"/>
+          </a:xfrm>
+          <a:prstGeom prst="ellipse">
+            <a:avLst/>
+          </a:prstGeom>
+          <a:solidFill>
+            <a:srgbClr val="00A0B0"/>
+          </a:solidFill>
+          <a:ln>
+            <a:noFill/>
+          </a:ln>
+        </p:spPr>
+        <p:style>
+          <a:lnRef idx="1">
+            <a:schemeClr val="accent1"/>
+          </a:lnRef>
+          <a:fillRef idx="3">
+            <a:schemeClr val="accent1"/>
+          </a:fillRef>
+          <a:effectRef idx="2">
+            <a:schemeClr val="accent1"/>
+          </a:effectRef>
+          <a:fontRef idx="minor">
+            <a:schemeClr val="lt1"/>
+          </a:fontRef>
+        </p:style>
+        <p:txBody>
+          <a:bodyPr rtlCol="0" anchor="ctr"/>
+          <a:lstStyle/>
+          <a:p>
+            <a:pPr algn="ctr"/>
+          </a:p>
+        </p:txBody>
+      </p:sp>
+      <p:sp>
+        <p:nvSpPr>
+          <p:cNvPr id="17" name="TextBox 16"/>
+          <p:cNvSpPr txBox="1"/>
+          <p:nvPr/>
+        </p:nvSpPr>
+        <p:spPr>
+          <a:xfrm>
+            <a:off x="914400" y="4183380"/>
+            <a:ext cx="777240" cy="777240"/>
+          </a:xfrm>
+          <a:prstGeom prst="rect">
+            <a:avLst/>
+          </a:prstGeom>
+          <a:noFill/>
+        </p:spPr>
+        <p:txBody>
+          <a:bodyPr wrap="square" lIns="45720" rIns="45720" tIns="18288" bIns="18288" anchor="ctr">
+            <a:spAutoFit/>
+          </a:bodyPr>
+          <a:lstStyle/>
+          <a:p>
+            <a:pPr algn="ctr"/>
+            <a:r>
+              <a:rPr sz="2800" b="1" i="0">
+                <a:solidFill>
+                  <a:srgbClr val="FFFFFF"/>
+                </a:solidFill>
+                <a:latin typeface="Calibri"/>
+              </a:rPr>
+              <a:t>4</a:t>
+            </a:r>
+          </a:p>
+        </p:txBody>
+      </p:sp>
+      <p:sp>
+        <p:nvSpPr>
+          <p:cNvPr id="18" name="Rounded Rectangle 17"/>
+          <p:cNvSpPr/>
+          <p:nvPr/>
+        </p:nvSpPr>
+        <p:spPr>
+          <a:xfrm>
+            <a:off x="2011680" y="4183380"/>
+            <a:ext cx="9144000" cy="777240"/>
+          </a:xfrm>
+          <a:prstGeom prst="roundRect">
+            <a:avLst>
+              <a:gd name="adj" fmla="val 8000"/>
+            </a:avLst>
+          </a:prstGeom>
+          <a:solidFill>
+            <a:srgbClr val="FBFBFD"/>
+          </a:solidFill>
+          <a:ln w="19050">
+            <a:solidFill>
+              <a:srgbClr val="00A0B0"/>
+            </a:solidFill>
+          </a:ln>
+        </p:spPr>
+        <p:style>
+          <a:lnRef idx="1">
+            <a:schemeClr val="accent1"/>
+          </a:lnRef>
+          <a:fillRef idx="3">
+            <a:schemeClr val="accent1"/>
+          </a:fillRef>
+          <a:effectRef idx="2">
+            <a:schemeClr val="accent1"/>
+          </a:effectRef>
+          <a:fontRef idx="minor">
+            <a:schemeClr val="lt1"/>
+          </a:fontRef>
+        </p:style>
+        <p:txBody>
+          <a:bodyPr rtlCol="0" anchor="ctr"/>
+          <a:lstStyle/>
+          <a:p>
+            <a:pPr algn="ctr"/>
+          </a:p>
+        </p:txBody>
+      </p:sp>
+      <p:sp>
+        <p:nvSpPr>
+          <p:cNvPr id="19" name="TextBox 18"/>
+          <p:cNvSpPr txBox="1"/>
+          <p:nvPr/>
+        </p:nvSpPr>
+        <p:spPr>
+          <a:xfrm>
+            <a:off x="2286000" y="4183380"/>
+            <a:ext cx="8686800" cy="777240"/>
+          </a:xfrm>
+          <a:prstGeom prst="rect">
+            <a:avLst/>
+          </a:prstGeom>
+          <a:noFill/>
+        </p:spPr>
+        <p:txBody>
+          <a:bodyPr wrap="square" lIns="45720" rIns="45720" tIns="18288" bIns="18288" anchor="ctr">
+            <a:spAutoFit/>
+          </a:bodyPr>
+          <a:lstStyle/>
+          <a:p>
+            <a:pPr algn="l"/>
+            <a:r>
+              <a:rPr sz="1800" b="0" i="0">
+                <a:solidFill>
+                  <a:srgbClr val="1A1A2E"/>
+                </a:solidFill>
+                <a:latin typeface="Calibri"/>
+              </a:rPr>
+              <a:t>ORM è più sicuro per default</a:t>
+            </a:r>
+          </a:p>
+        </p:txBody>
+      </p:sp>
+      <p:sp>
+        <p:nvSpPr>
+          <p:cNvPr id="20" name="Oval 19"/>
+          <p:cNvSpPr/>
+          <p:nvPr/>
+        </p:nvSpPr>
+        <p:spPr>
+          <a:xfrm>
+            <a:off x="914400" y="5097780"/>
+            <a:ext cx="777240" cy="777240"/>
+          </a:xfrm>
+          <a:prstGeom prst="ellipse">
+            <a:avLst/>
+          </a:prstGeom>
+          <a:solidFill>
+            <a:srgbClr val="00A0B0"/>
+          </a:solidFill>
+          <a:ln>
+            <a:noFill/>
+          </a:ln>
+        </p:spPr>
+        <p:style>
+          <a:lnRef idx="1">
+            <a:schemeClr val="accent1"/>
+          </a:lnRef>
+          <a:fillRef idx="3">
+            <a:schemeClr val="accent1"/>
+          </a:fillRef>
+          <a:effectRef idx="2">
+            <a:schemeClr val="accent1"/>
+          </a:effectRef>
+          <a:fontRef idx="minor">
+            <a:schemeClr val="lt1"/>
+          </a:fontRef>
+        </p:style>
+        <p:txBody>
+          <a:bodyPr rtlCol="0" anchor="ctr"/>
+          <a:lstStyle/>
+          <a:p>
+            <a:pPr algn="ctr"/>
+          </a:p>
+        </p:txBody>
+      </p:sp>
+      <p:sp>
+        <p:nvSpPr>
+          <p:cNvPr id="21" name="TextBox 20"/>
+          <p:cNvSpPr txBox="1"/>
+          <p:nvPr/>
+        </p:nvSpPr>
+        <p:spPr>
+          <a:xfrm>
+            <a:off x="914400" y="5097780"/>
+            <a:ext cx="777240" cy="777240"/>
+          </a:xfrm>
+          <a:prstGeom prst="rect">
+            <a:avLst/>
+          </a:prstGeom>
+          <a:noFill/>
+        </p:spPr>
+        <p:txBody>
+          <a:bodyPr wrap="square" lIns="45720" rIns="45720" tIns="18288" bIns="18288" anchor="ctr">
+            <a:spAutoFit/>
+          </a:bodyPr>
+          <a:lstStyle/>
+          <a:p>
+            <a:pPr algn="ctr"/>
+            <a:r>
+              <a:rPr sz="2800" b="1" i="0">
+                <a:solidFill>
+                  <a:srgbClr val="FFFFFF"/>
+                </a:solidFill>
+                <a:latin typeface="Calibri"/>
+              </a:rPr>
+              <a:t>5</a:t>
+            </a:r>
+          </a:p>
+        </p:txBody>
+      </p:sp>
+      <p:sp>
+        <p:nvSpPr>
+          <p:cNvPr id="22" name="Rounded Rectangle 21"/>
+          <p:cNvSpPr/>
+          <p:nvPr/>
+        </p:nvSpPr>
+        <p:spPr>
+          <a:xfrm>
+            <a:off x="2011680" y="5097780"/>
+            <a:ext cx="9144000" cy="777240"/>
+          </a:xfrm>
+          <a:prstGeom prst="roundRect">
+            <a:avLst>
+              <a:gd name="adj" fmla="val 8000"/>
+            </a:avLst>
+          </a:prstGeom>
+          <a:solidFill>
+            <a:srgbClr val="FBFBFD"/>
+          </a:solidFill>
+          <a:ln w="19050">
+            <a:solidFill>
+              <a:srgbClr val="00A0B0"/>
+            </a:solidFill>
+          </a:ln>
+        </p:spPr>
+        <p:style>
+          <a:lnRef idx="1">
+            <a:schemeClr val="accent1"/>
+          </a:lnRef>
+          <a:fillRef idx="3">
+            <a:schemeClr val="accent1"/>
+          </a:fillRef>
+          <a:effectRef idx="2">
+            <a:schemeClr val="accent1"/>
+          </a:effectRef>
+          <a:fontRef idx="minor">
+            <a:schemeClr val="lt1"/>
+          </a:fontRef>
+        </p:style>
+        <p:txBody>
+          <a:bodyPr rtlCol="0" anchor="ctr"/>
+          <a:lstStyle/>
+          <a:p>
+            <a:pPr algn="ctr"/>
+          </a:p>
+        </p:txBody>
+      </p:sp>
+      <p:sp>
+        <p:nvSpPr>
+          <p:cNvPr id="23" name="TextBox 22"/>
+          <p:cNvSpPr txBox="1"/>
+          <p:nvPr/>
+        </p:nvSpPr>
+        <p:spPr>
+          <a:xfrm>
+            <a:off x="2286000" y="5097780"/>
+            <a:ext cx="8686800" cy="777240"/>
+          </a:xfrm>
+          <a:prstGeom prst="rect">
+            <a:avLst/>
+          </a:prstGeom>
+          <a:noFill/>
+        </p:spPr>
+        <p:txBody>
+          <a:bodyPr wrap="square" lIns="45720" rIns="45720" tIns="18288" bIns="18288" anchor="ctr">
+            <a:spAutoFit/>
+          </a:bodyPr>
+          <a:lstStyle/>
+          <a:p>
+            <a:pPr algn="l"/>
+            <a:r>
+              <a:rPr sz="1800" b="0" i="0">
+                <a:solidFill>
+                  <a:srgbClr val="1A1A2E"/>
+                </a:solidFill>
+                <a:latin typeface="Calibri"/>
+              </a:rPr>
+              <a:t>Difese stratificate: 7 livelli di protezione</a:t>
             </a:r>
           </a:p>
         </p:txBody>
       </p:sp>
       <p:cxnSp>
         <p:nvCxnSpPr>
-          <p:cNvPr id="9" name="Connector 8"/>
+          <p:cNvPr id="24" name="Connector 23"/>
           <p:cNvCxnSpPr/>
           <p:nvPr/>
         </p:nvCxnSpPr>
@@ -5875,7 +6517,7 @@
       </p:cxnSp>
       <p:sp>
         <p:nvSpPr>
-          <p:cNvPr id="10" name="TextBox 9"/>
+          <p:cNvPr id="25" name="TextBox 24"/>
           <p:cNvSpPr txBox="1"/>
           <p:nvPr/>
         </p:nvSpPr>
@@ -5910,7 +6552,7 @@
       </p:sp>
       <p:sp>
         <p:nvSpPr>
-          <p:cNvPr id="11" name="TextBox 10"/>
+          <p:cNvPr id="26" name="TextBox 25"/>
           <p:cNvSpPr txBox="1"/>
           <p:nvPr/>
         </p:nvSpPr>
@@ -5938,7 +6580,7 @@
                 </a:solidFill>
                 <a:latin typeface="Calibri"/>
               </a:rPr>
-              <a:t>L3  ·  13/14</a:t>
+              <a:t>L3  ·  13/15</a:t>
             </a:r>
           </a:p>
         </p:txBody>
@@ -5970,7 +6612,7 @@
         <p:spPr>
           <a:xfrm>
             <a:off x="0" y="0"/>
-            <a:ext cx="12191695" cy="6858000"/>
+            <a:ext cx="4114800" cy="6858000"/>
           </a:xfrm>
           <a:prstGeom prst="rect">
             <a:avLst/>
@@ -6006,6 +6648,398 @@
       </p:sp>
       <p:sp>
         <p:nvSpPr>
+          <p:cNvPr id="3" name="Rectangle 2"/>
+          <p:cNvSpPr/>
+          <p:nvPr/>
+        </p:nvSpPr>
+        <p:spPr>
+          <a:xfrm>
+            <a:off x="4114800" y="0"/>
+            <a:ext cx="8046720" cy="6858000"/>
+          </a:xfrm>
+          <a:prstGeom prst="rect">
+            <a:avLst/>
+          </a:prstGeom>
+          <a:solidFill>
+            <a:srgbClr val="F1F4F8"/>
+          </a:solidFill>
+          <a:ln>
+            <a:noFill/>
+          </a:ln>
+        </p:spPr>
+        <p:style>
+          <a:lnRef idx="1">
+            <a:schemeClr val="accent1"/>
+          </a:lnRef>
+          <a:fillRef idx="3">
+            <a:schemeClr val="accent1"/>
+          </a:fillRef>
+          <a:effectRef idx="2">
+            <a:schemeClr val="accent1"/>
+          </a:effectRef>
+          <a:fontRef idx="minor">
+            <a:schemeClr val="lt1"/>
+          </a:fontRef>
+        </p:style>
+        <p:txBody>
+          <a:bodyPr rtlCol="0" anchor="ctr"/>
+          <a:lstStyle/>
+          <a:p>
+            <a:pPr algn="ctr"/>
+          </a:p>
+        </p:txBody>
+      </p:sp>
+      <p:sp>
+        <p:nvSpPr>
+          <p:cNvPr id="4" name="Rectangle 3"/>
+          <p:cNvSpPr/>
+          <p:nvPr/>
+        </p:nvSpPr>
+        <p:spPr>
+          <a:xfrm>
+            <a:off x="4114800" y="0"/>
+            <a:ext cx="137160" cy="6858000"/>
+          </a:xfrm>
+          <a:prstGeom prst="rect">
+            <a:avLst/>
+          </a:prstGeom>
+          <a:solidFill>
+            <a:srgbClr val="00A0B0"/>
+          </a:solidFill>
+          <a:ln>
+            <a:noFill/>
+          </a:ln>
+        </p:spPr>
+        <p:style>
+          <a:lnRef idx="1">
+            <a:schemeClr val="accent1"/>
+          </a:lnRef>
+          <a:fillRef idx="3">
+            <a:schemeClr val="accent1"/>
+          </a:fillRef>
+          <a:effectRef idx="2">
+            <a:schemeClr val="accent1"/>
+          </a:effectRef>
+          <a:fontRef idx="minor">
+            <a:schemeClr val="lt1"/>
+          </a:fontRef>
+        </p:style>
+        <p:txBody>
+          <a:bodyPr rtlCol="0" anchor="ctr"/>
+          <a:lstStyle/>
+          <a:p>
+            <a:pPr algn="ctr"/>
+          </a:p>
+        </p:txBody>
+      </p:sp>
+      <p:sp>
+        <p:nvSpPr>
+          <p:cNvPr id="5" name="TextBox 4"/>
+          <p:cNvSpPr txBox="1"/>
+          <p:nvPr/>
+        </p:nvSpPr>
+        <p:spPr>
+          <a:xfrm>
+            <a:off x="274320" y="2103120"/>
+            <a:ext cx="3657600" cy="2286000"/>
+          </a:xfrm>
+          <a:prstGeom prst="rect">
+            <a:avLst/>
+          </a:prstGeom>
+          <a:noFill/>
+        </p:spPr>
+        <p:txBody>
+          <a:bodyPr wrap="square" lIns="45720" rIns="45720" tIns="18288" bIns="18288" anchor="t">
+            <a:spAutoFit/>
+          </a:bodyPr>
+          <a:lstStyle/>
+          <a:p>
+            <a:pPr algn="ctr"/>
+            <a:r>
+              <a:rPr sz="17000" b="1" i="0">
+                <a:solidFill>
+                  <a:srgbClr val="00A0B0"/>
+                </a:solidFill>
+                <a:latin typeface="Calibri"/>
+              </a:rPr>
+              <a:t>03</a:t>
+            </a:r>
+          </a:p>
+        </p:txBody>
+      </p:sp>
+      <p:sp>
+        <p:nvSpPr>
+          <p:cNvPr id="6" name="TextBox 5"/>
+          <p:cNvSpPr txBox="1"/>
+          <p:nvPr/>
+        </p:nvSpPr>
+        <p:spPr>
+          <a:xfrm>
+            <a:off x="274320" y="4572000"/>
+            <a:ext cx="3657600" cy="457200"/>
+          </a:xfrm>
+          <a:prstGeom prst="rect">
+            <a:avLst/>
+          </a:prstGeom>
+          <a:noFill/>
+        </p:spPr>
+        <p:txBody>
+          <a:bodyPr wrap="square" lIns="45720" rIns="45720" tIns="18288" bIns="18288" anchor="t">
+            <a:spAutoFit/>
+          </a:bodyPr>
+          <a:lstStyle/>
+          <a:p>
+            <a:pPr algn="ctr"/>
+            <a:r>
+              <a:rPr sz="2000" b="1" i="0">
+                <a:solidFill>
+                  <a:srgbClr val="6FD8E0"/>
+                </a:solidFill>
+                <a:latin typeface="Calibri"/>
+              </a:rPr>
+              <a:t>PARTE</a:t>
+            </a:r>
+          </a:p>
+        </p:txBody>
+      </p:sp>
+      <p:sp>
+        <p:nvSpPr>
+          <p:cNvPr id="7" name="TextBox 6"/>
+          <p:cNvSpPr txBox="1"/>
+          <p:nvPr/>
+        </p:nvSpPr>
+        <p:spPr>
+          <a:xfrm>
+            <a:off x="4572000" y="2286000"/>
+            <a:ext cx="7315200" cy="1645920"/>
+          </a:xfrm>
+          <a:prstGeom prst="rect">
+            <a:avLst/>
+          </a:prstGeom>
+          <a:noFill/>
+        </p:spPr>
+        <p:txBody>
+          <a:bodyPr wrap="square" lIns="45720" rIns="45720" tIns="18288" bIns="18288" anchor="t">
+            <a:spAutoFit/>
+          </a:bodyPr>
+          <a:lstStyle/>
+          <a:p>
+            <a:pPr algn="l"/>
+            <a:r>
+              <a:rPr sz="4400" b="1" i="0">
+                <a:solidFill>
+                  <a:srgbClr val="0F2D52"/>
+                </a:solidFill>
+                <a:latin typeface="Calibri"/>
+              </a:rPr>
+              <a:t>Laboratorio</a:t>
+            </a:r>
+          </a:p>
+        </p:txBody>
+      </p:sp>
+      <p:sp>
+        <p:nvSpPr>
+          <p:cNvPr id="8" name="TextBox 7"/>
+          <p:cNvSpPr txBox="1"/>
+          <p:nvPr/>
+        </p:nvSpPr>
+        <p:spPr>
+          <a:xfrm>
+            <a:off x="4572000" y="3931920"/>
+            <a:ext cx="7315200" cy="1828800"/>
+          </a:xfrm>
+          <a:prstGeom prst="rect">
+            <a:avLst/>
+          </a:prstGeom>
+          <a:noFill/>
+        </p:spPr>
+        <p:txBody>
+          <a:bodyPr wrap="square" lIns="45720" rIns="45720" tIns="18288" bIns="18288" anchor="t">
+            <a:spAutoFit/>
+          </a:bodyPr>
+          <a:lstStyle/>
+          <a:p>
+            <a:pPr algn="l"/>
+            <a:r>
+              <a:rPr sz="1800" b="0" i="1">
+                <a:solidFill>
+                  <a:srgbClr val="6B7280"/>
+                </a:solidFill>
+                <a:latin typeface="Calibri"/>
+              </a:rPr>
+              <a:t>Mini-banca: app vulnerabile → la sfrutti → la correggi</a:t>
+            </a:r>
+          </a:p>
+        </p:txBody>
+      </p:sp>
+      <p:cxnSp>
+        <p:nvCxnSpPr>
+          <p:cNvPr id="9" name="Connector 8"/>
+          <p:cNvCxnSpPr/>
+          <p:nvPr/>
+        </p:nvCxnSpPr>
+        <p:spPr>
+          <a:xfrm>
+            <a:off x="457200" y="6446520"/>
+            <a:ext cx="11274552" cy="0"/>
+          </a:xfrm>
+          <a:prstGeom prst="line">
+            <a:avLst/>
+          </a:prstGeom>
+          <a:ln w="19050">
+            <a:solidFill>
+              <a:srgbClr val="00A0B0"/>
+            </a:solidFill>
+          </a:ln>
+        </p:spPr>
+        <p:style>
+          <a:lnRef idx="2">
+            <a:schemeClr val="accent1"/>
+          </a:lnRef>
+          <a:fillRef idx="0">
+            <a:schemeClr val="accent1"/>
+          </a:fillRef>
+          <a:effectRef idx="1">
+            <a:schemeClr val="accent1"/>
+          </a:effectRef>
+          <a:fontRef idx="minor">
+            <a:schemeClr val="tx1"/>
+          </a:fontRef>
+        </p:style>
+      </p:cxnSp>
+      <p:sp>
+        <p:nvSpPr>
+          <p:cNvPr id="10" name="TextBox 9"/>
+          <p:cNvSpPr txBox="1"/>
+          <p:nvPr/>
+        </p:nvSpPr>
+        <p:spPr>
+          <a:xfrm>
+            <a:off x="457200" y="6473952"/>
+            <a:ext cx="7315200" cy="292608"/>
+          </a:xfrm>
+          <a:prstGeom prst="rect">
+            <a:avLst/>
+          </a:prstGeom>
+          <a:noFill/>
+        </p:spPr>
+        <p:txBody>
+          <a:bodyPr wrap="square" lIns="45720" rIns="45720" tIns="18288" bIns="18288" anchor="t">
+            <a:spAutoFit/>
+          </a:bodyPr>
+          <a:lstStyle/>
+          <a:p>
+            <a:pPr algn="l"/>
+            <a:r>
+              <a:rPr sz="1000" b="0" i="0">
+                <a:solidFill>
+                  <a:srgbClr val="6B7280"/>
+                </a:solidFill>
+                <a:latin typeface="Calibri"/>
+              </a:rPr>
+              <a:t>Secure Coding · Corso IFTS STEM · A. Manneschi · 2024/2025</a:t>
+            </a:r>
+          </a:p>
+        </p:txBody>
+      </p:sp>
+      <p:sp>
+        <p:nvSpPr>
+          <p:cNvPr id="11" name="TextBox 10"/>
+          <p:cNvSpPr txBox="1"/>
+          <p:nvPr/>
+        </p:nvSpPr>
+        <p:spPr>
+          <a:xfrm>
+            <a:off x="10515600" y="6473952"/>
+            <a:ext cx="1188720" cy="292608"/>
+          </a:xfrm>
+          <a:prstGeom prst="rect">
+            <a:avLst/>
+          </a:prstGeom>
+          <a:noFill/>
+        </p:spPr>
+        <p:txBody>
+          <a:bodyPr wrap="square" lIns="45720" rIns="45720" tIns="18288" bIns="18288" anchor="t">
+            <a:spAutoFit/>
+          </a:bodyPr>
+          <a:lstStyle/>
+          <a:p>
+            <a:pPr algn="r"/>
+            <a:r>
+              <a:rPr sz="1000" b="1" i="0">
+                <a:solidFill>
+                  <a:srgbClr val="6B7280"/>
+                </a:solidFill>
+                <a:latin typeface="Calibri"/>
+              </a:rPr>
+              <a:t>L3  ·  14/15</a:t>
+            </a:r>
+          </a:p>
+        </p:txBody>
+      </p:sp>
+    </p:spTree>
+  </p:cSld>
+  <p:clrMapOvr>
+    <a:masterClrMapping/>
+  </p:clrMapOvr>
+</p:sld>
+</file>
+
+<file path=ppt/slides/slide15.xml><?xml version="1.0" encoding="utf-8"?>
+<p:sld xmlns:a="http://schemas.openxmlformats.org/drawingml/2006/main" xmlns:p="http://schemas.openxmlformats.org/presentationml/2006/main" xmlns:r="http://schemas.openxmlformats.org/officeDocument/2006/relationships">
+  <p:cSld>
+    <p:spTree>
+      <p:nvGrpSpPr>
+        <p:cNvPr id="1" name=""/>
+        <p:cNvGrpSpPr/>
+        <p:nvPr/>
+      </p:nvGrpSpPr>
+      <p:grpSpPr/>
+      <p:sp>
+        <p:nvSpPr>
+          <p:cNvPr id="2" name="Rectangle 1"/>
+          <p:cNvSpPr/>
+          <p:nvPr/>
+        </p:nvSpPr>
+        <p:spPr>
+          <a:xfrm>
+            <a:off x="0" y="0"/>
+            <a:ext cx="12191695" cy="6858000"/>
+          </a:xfrm>
+          <a:prstGeom prst="rect">
+            <a:avLst/>
+          </a:prstGeom>
+          <a:solidFill>
+            <a:srgbClr val="081B33"/>
+          </a:solidFill>
+          <a:ln>
+            <a:noFill/>
+          </a:ln>
+        </p:spPr>
+        <p:style>
+          <a:lnRef idx="1">
+            <a:schemeClr val="accent1"/>
+          </a:lnRef>
+          <a:fillRef idx="3">
+            <a:schemeClr val="accent1"/>
+          </a:fillRef>
+          <a:effectRef idx="2">
+            <a:schemeClr val="accent1"/>
+          </a:effectRef>
+          <a:fontRef idx="minor">
+            <a:schemeClr val="lt1"/>
+          </a:fontRef>
+        </p:style>
+        <p:txBody>
+          <a:bodyPr rtlCol="0" anchor="ctr"/>
+          <a:lstStyle/>
+          <a:p>
+            <a:pPr algn="ctr"/>
+          </a:p>
+        </p:txBody>
+      </p:sp>
+      <p:sp>
+        <p:nvSpPr>
           <p:cNvPr id="3" name="Oval 2"/>
           <p:cNvSpPr/>
           <p:nvPr/>
@@ -6418,7 +7452,7 @@
                 </a:solidFill>
                 <a:latin typeface="Calibri"/>
               </a:rPr>
-              <a:t>L3  ·  14/14</a:t>
+              <a:t>L3  ·  15/15</a:t>
             </a:r>
           </a:p>
         </p:txBody>
@@ -7254,7 +8288,7 @@
                 </a:solidFill>
                 <a:latin typeface="Calibri"/>
               </a:rPr>
-              <a:t>L3  ·  2/14</a:t>
+              <a:t>L3  ·  2/15</a:t>
             </a:r>
           </a:p>
         </p:txBody>
@@ -7568,7 +8602,7 @@
                 </a:solidFill>
                 <a:latin typeface="Calibri"/>
               </a:rPr>
-              <a:t>L3  ·  3/14</a:t>
+              <a:t>L3  ·  3/15</a:t>
             </a:r>
           </a:p>
         </p:txBody>
@@ -7828,7 +8862,7 @@
                 </a:solidFill>
                 <a:latin typeface="Calibri"/>
               </a:rPr>
-              <a:t>L3  ·  4/14</a:t>
+              <a:t>L3  ·  4/15</a:t>
             </a:r>
           </a:p>
         </p:txBody>
@@ -8088,7 +9122,7 @@
                 </a:solidFill>
                 <a:latin typeface="Calibri"/>
               </a:rPr>
-              <a:t>L3  ·  5/14</a:t>
+              <a:t>L3  ·  5/15</a:t>
             </a:r>
           </a:p>
         </p:txBody>
@@ -8348,7 +9382,7 @@
                 </a:solidFill>
                 <a:latin typeface="Calibri"/>
               </a:rPr>
-              <a:t>L3  ·  6/14</a:t>
+              <a:t>L3  ·  6/15</a:t>
             </a:r>
           </a:p>
         </p:txBody>
@@ -8380,13 +9414,13 @@
         <p:spPr>
           <a:xfrm>
             <a:off x="0" y="0"/>
-            <a:ext cx="4114800" cy="6858000"/>
+            <a:ext cx="12191695" cy="777240"/>
           </a:xfrm>
           <a:prstGeom prst="rect">
             <a:avLst/>
           </a:prstGeom>
           <a:solidFill>
-            <a:srgbClr val="081B33"/>
+            <a:srgbClr val="0F2D52"/>
           </a:solidFill>
           <a:ln>
             <a:noFill/>
@@ -8416,20 +9450,57 @@
       </p:sp>
       <p:sp>
         <p:nvSpPr>
-          <p:cNvPr id="3" name="Rectangle 2"/>
+          <p:cNvPr id="3" name="TextBox 2"/>
+          <p:cNvSpPr txBox="1"/>
+          <p:nvPr/>
+        </p:nvSpPr>
+        <p:spPr>
+          <a:xfrm>
+            <a:off x="457200" y="164592"/>
+            <a:ext cx="9144000" cy="502920"/>
+          </a:xfrm>
+          <a:prstGeom prst="rect">
+            <a:avLst/>
+          </a:prstGeom>
+          <a:noFill/>
+        </p:spPr>
+        <p:txBody>
+          <a:bodyPr wrap="square" lIns="45720" rIns="45720" tIns="18288" bIns="18288" anchor="ctr">
+            <a:spAutoFit/>
+          </a:bodyPr>
+          <a:lstStyle/>
+          <a:p>
+            <a:pPr algn="l"/>
+            <a:r>
+              <a:rPr sz="2200" b="1" i="0">
+                <a:solidFill>
+                  <a:srgbClr val="FFFFFF"/>
+                </a:solidFill>
+                <a:latin typeface="Calibri"/>
+              </a:rPr>
+              <a:t>UNION SELECT — estrazione dati (peggio del bypass)</a:t>
+            </a:r>
+          </a:p>
+        </p:txBody>
+      </p:sp>
+      <p:sp>
+        <p:nvSpPr>
+          <p:cNvPr id="4" name="Rounded Rectangle 3"/>
           <p:cNvSpPr/>
           <p:nvPr/>
         </p:nvSpPr>
         <p:spPr>
           <a:xfrm>
-            <a:off x="4114800" y="0"/>
-            <a:ext cx="8046720" cy="6858000"/>
-          </a:xfrm>
-          <a:prstGeom prst="rect">
-            <a:avLst/>
+            <a:off x="9784080" y="164592"/>
+            <a:ext cx="2194560" cy="457200"/>
+          </a:xfrm>
+          <a:prstGeom prst="roundRect">
+            <a:avLst>
+              <a:gd name="adj" fmla="val 8000"/>
+            </a:avLst>
           </a:prstGeom>
           <a:solidFill>
-            <a:srgbClr val="F1F4F8"/>
+            <a:srgbClr val="E63946"/>
           </a:solidFill>
           <a:ln>
             <a:noFill/>
@@ -8459,20 +9530,55 @@
       </p:sp>
       <p:sp>
         <p:nvSpPr>
-          <p:cNvPr id="4" name="Rectangle 3"/>
+          <p:cNvPr id="5" name="TextBox 4"/>
+          <p:cNvSpPr txBox="1"/>
+          <p:nvPr/>
+        </p:nvSpPr>
+        <p:spPr>
+          <a:xfrm>
+            <a:off x="9784080" y="164592"/>
+            <a:ext cx="2194560" cy="457200"/>
+          </a:xfrm>
+          <a:prstGeom prst="rect">
+            <a:avLst/>
+          </a:prstGeom>
+          <a:noFill/>
+        </p:spPr>
+        <p:txBody>
+          <a:bodyPr wrap="square" lIns="45720" rIns="45720" tIns="18288" bIns="18288" anchor="ctr">
+            <a:spAutoFit/>
+          </a:bodyPr>
+          <a:lstStyle/>
+          <a:p>
+            <a:pPr algn="ctr"/>
+            <a:r>
+              <a:rPr sz="1200" b="1" i="0">
+                <a:solidFill>
+                  <a:srgbClr val="FFFFFF"/>
+                </a:solidFill>
+                <a:latin typeface="Calibri"/>
+              </a:rPr>
+              <a:t>🚩 ANTI-PATTERN</a:t>
+            </a:r>
+          </a:p>
+        </p:txBody>
+      </p:sp>
+      <p:sp>
+        <p:nvSpPr>
+          <p:cNvPr id="6" name="Rectangle 5"/>
           <p:cNvSpPr/>
           <p:nvPr/>
         </p:nvSpPr>
         <p:spPr>
           <a:xfrm>
-            <a:off x="4114800" y="0"/>
-            <a:ext cx="137160" cy="6858000"/>
+            <a:off x="457200" y="1097280"/>
+            <a:ext cx="11247120" cy="365760"/>
           </a:xfrm>
           <a:prstGeom prst="rect">
             <a:avLst/>
           </a:prstGeom>
           <a:solidFill>
-            <a:srgbClr val="00A0B0"/>
+            <a:srgbClr val="2D2D37"/>
           </a:solidFill>
           <a:ln>
             <a:noFill/>
@@ -8502,14 +9608,920 @@
       </p:sp>
       <p:sp>
         <p:nvSpPr>
-          <p:cNvPr id="5" name="TextBox 4"/>
+          <p:cNvPr id="7" name="Oval 6"/>
+          <p:cNvSpPr/>
+          <p:nvPr/>
+        </p:nvSpPr>
+        <p:spPr>
+          <a:xfrm>
+            <a:off x="594360" y="1216152"/>
+            <a:ext cx="118872" cy="118872"/>
+          </a:xfrm>
+          <a:prstGeom prst="ellipse">
+            <a:avLst/>
+          </a:prstGeom>
+          <a:solidFill>
+            <a:srgbClr val="FF5F56"/>
+          </a:solidFill>
+          <a:ln>
+            <a:noFill/>
+          </a:ln>
+        </p:spPr>
+        <p:style>
+          <a:lnRef idx="1">
+            <a:schemeClr val="accent1"/>
+          </a:lnRef>
+          <a:fillRef idx="3">
+            <a:schemeClr val="accent1"/>
+          </a:fillRef>
+          <a:effectRef idx="2">
+            <a:schemeClr val="accent1"/>
+          </a:effectRef>
+          <a:fontRef idx="minor">
+            <a:schemeClr val="lt1"/>
+          </a:fontRef>
+        </p:style>
+        <p:txBody>
+          <a:bodyPr rtlCol="0" anchor="ctr"/>
+          <a:lstStyle/>
+          <a:p>
+            <a:pPr algn="ctr"/>
+          </a:p>
+        </p:txBody>
+      </p:sp>
+      <p:sp>
+        <p:nvSpPr>
+          <p:cNvPr id="8" name="Oval 7"/>
+          <p:cNvSpPr/>
+          <p:nvPr/>
+        </p:nvSpPr>
+        <p:spPr>
+          <a:xfrm>
+            <a:off x="777240" y="1216152"/>
+            <a:ext cx="118872" cy="118872"/>
+          </a:xfrm>
+          <a:prstGeom prst="ellipse">
+            <a:avLst/>
+          </a:prstGeom>
+          <a:solidFill>
+            <a:srgbClr val="FFBD2E"/>
+          </a:solidFill>
+          <a:ln>
+            <a:noFill/>
+          </a:ln>
+        </p:spPr>
+        <p:style>
+          <a:lnRef idx="1">
+            <a:schemeClr val="accent1"/>
+          </a:lnRef>
+          <a:fillRef idx="3">
+            <a:schemeClr val="accent1"/>
+          </a:fillRef>
+          <a:effectRef idx="2">
+            <a:schemeClr val="accent1"/>
+          </a:effectRef>
+          <a:fontRef idx="minor">
+            <a:schemeClr val="lt1"/>
+          </a:fontRef>
+        </p:style>
+        <p:txBody>
+          <a:bodyPr rtlCol="0" anchor="ctr"/>
+          <a:lstStyle/>
+          <a:p>
+            <a:pPr algn="ctr"/>
+          </a:p>
+        </p:txBody>
+      </p:sp>
+      <p:sp>
+        <p:nvSpPr>
+          <p:cNvPr id="9" name="Oval 8"/>
+          <p:cNvSpPr/>
+          <p:nvPr/>
+        </p:nvSpPr>
+        <p:spPr>
+          <a:xfrm>
+            <a:off x="960120" y="1216152"/>
+            <a:ext cx="118872" cy="118872"/>
+          </a:xfrm>
+          <a:prstGeom prst="ellipse">
+            <a:avLst/>
+          </a:prstGeom>
+          <a:solidFill>
+            <a:srgbClr val="27C93F"/>
+          </a:solidFill>
+          <a:ln>
+            <a:noFill/>
+          </a:ln>
+        </p:spPr>
+        <p:style>
+          <a:lnRef idx="1">
+            <a:schemeClr val="accent1"/>
+          </a:lnRef>
+          <a:fillRef idx="3">
+            <a:schemeClr val="accent1"/>
+          </a:fillRef>
+          <a:effectRef idx="2">
+            <a:schemeClr val="accent1"/>
+          </a:effectRef>
+          <a:fontRef idx="minor">
+            <a:schemeClr val="lt1"/>
+          </a:fontRef>
+        </p:style>
+        <p:txBody>
+          <a:bodyPr rtlCol="0" anchor="ctr"/>
+          <a:lstStyle/>
+          <a:p>
+            <a:pPr algn="ctr"/>
+          </a:p>
+        </p:txBody>
+      </p:sp>
+      <p:sp>
+        <p:nvSpPr>
+          <p:cNvPr id="10" name="TextBox 9"/>
           <p:cNvSpPr txBox="1"/>
           <p:nvPr/>
         </p:nvSpPr>
         <p:spPr>
           <a:xfrm>
-            <a:off x="274320" y="2103120"/>
-            <a:ext cx="3657600" cy="2286000"/>
+            <a:off x="1371600" y="1161288"/>
+            <a:ext cx="5486400" cy="274320"/>
+          </a:xfrm>
+          <a:prstGeom prst="rect">
+            <a:avLst/>
+          </a:prstGeom>
+          <a:noFill/>
+        </p:spPr>
+        <p:txBody>
+          <a:bodyPr wrap="square" lIns="45720" rIns="45720" tIns="18288" bIns="18288" anchor="ctr">
+            <a:spAutoFit/>
+          </a:bodyPr>
+          <a:lstStyle/>
+          <a:p>
+            <a:pPr algn="l"/>
+            <a:r>
+              <a:rPr sz="1000" b="0" i="0">
+                <a:solidFill>
+                  <a:srgbClr val="CBD0D8"/>
+                </a:solidFill>
+                <a:latin typeface="Calibri"/>
+              </a:rPr>
+              <a:t>  app.py  —  sql</a:t>
+            </a:r>
+          </a:p>
+        </p:txBody>
+      </p:sp>
+      <p:sp>
+        <p:nvSpPr>
+          <p:cNvPr id="11" name="Rectangle 10"/>
+          <p:cNvSpPr/>
+          <p:nvPr/>
+        </p:nvSpPr>
+        <p:spPr>
+          <a:xfrm>
+            <a:off x="457200" y="1463040"/>
+            <a:ext cx="11247120" cy="4206240"/>
+          </a:xfrm>
+          <a:prstGeom prst="rect">
+            <a:avLst/>
+          </a:prstGeom>
+          <a:solidFill>
+            <a:srgbClr val="1E1E28"/>
+          </a:solidFill>
+          <a:ln w="19050">
+            <a:solidFill>
+              <a:srgbClr val="E63946"/>
+            </a:solidFill>
+          </a:ln>
+        </p:spPr>
+        <p:style>
+          <a:lnRef idx="1">
+            <a:schemeClr val="accent1"/>
+          </a:lnRef>
+          <a:fillRef idx="3">
+            <a:schemeClr val="accent1"/>
+          </a:fillRef>
+          <a:effectRef idx="2">
+            <a:schemeClr val="accent1"/>
+          </a:effectRef>
+          <a:fontRef idx="minor">
+            <a:schemeClr val="lt1"/>
+          </a:fontRef>
+        </p:style>
+        <p:txBody>
+          <a:bodyPr rtlCol="0" anchor="ctr"/>
+          <a:lstStyle/>
+          <a:p>
+            <a:pPr algn="ctr"/>
+          </a:p>
+        </p:txBody>
+      </p:sp>
+      <p:sp>
+        <p:nvSpPr>
+          <p:cNvPr id="12" name="Rectangle 11"/>
+          <p:cNvSpPr/>
+          <p:nvPr/>
+        </p:nvSpPr>
+        <p:spPr>
+          <a:xfrm>
+            <a:off x="457200" y="1463040"/>
+            <a:ext cx="457200" cy="4206240"/>
+          </a:xfrm>
+          <a:prstGeom prst="rect">
+            <a:avLst/>
+          </a:prstGeom>
+          <a:solidFill>
+            <a:srgbClr val="24242E"/>
+          </a:solidFill>
+          <a:ln>
+            <a:noFill/>
+          </a:ln>
+        </p:spPr>
+        <p:style>
+          <a:lnRef idx="1">
+            <a:schemeClr val="accent1"/>
+          </a:lnRef>
+          <a:fillRef idx="3">
+            <a:schemeClr val="accent1"/>
+          </a:fillRef>
+          <a:effectRef idx="2">
+            <a:schemeClr val="accent1"/>
+          </a:effectRef>
+          <a:fontRef idx="minor">
+            <a:schemeClr val="lt1"/>
+          </a:fontRef>
+        </p:style>
+        <p:txBody>
+          <a:bodyPr rtlCol="0" anchor="ctr"/>
+          <a:lstStyle/>
+          <a:p>
+            <a:pPr algn="ctr"/>
+          </a:p>
+        </p:txBody>
+      </p:sp>
+      <p:sp>
+        <p:nvSpPr>
+          <p:cNvPr id="13" name="TextBox 12"/>
+          <p:cNvSpPr txBox="1"/>
+          <p:nvPr/>
+        </p:nvSpPr>
+        <p:spPr>
+          <a:xfrm>
+            <a:off x="1051560" y="1600200"/>
+            <a:ext cx="10607040" cy="4114800"/>
+          </a:xfrm>
+          <a:prstGeom prst="rect">
+            <a:avLst/>
+          </a:prstGeom>
+          <a:noFill/>
+        </p:spPr>
+        <p:txBody>
+          <a:bodyPr wrap="none">
+            <a:spAutoFit/>
+          </a:bodyPr>
+          <a:lstStyle/>
+          <a:p>
+            <a:pPr>
+              <a:lnSpc>
+                <a:spcPct val="115000"/>
+              </a:lnSpc>
+              <a:spcAft>
+                <a:spcPts val="0"/>
+              </a:spcAft>
+            </a:pPr>
+            <a:r>
+              <a:rPr sz="1300">
+                <a:solidFill>
+                  <a:srgbClr val="E5E5EC"/>
+                </a:solidFill>
+                <a:latin typeface="Consolas"/>
+              </a:rPr>
+              <a:t># La pagina /cerca è vulnerabile a SQLi:</a:t>
+            </a:r>
+          </a:p>
+          <a:p>
+            <a:pPr>
+              <a:lnSpc>
+                <a:spcPct val="115000"/>
+              </a:lnSpc>
+              <a:spcAft>
+                <a:spcPts val="0"/>
+              </a:spcAft>
+            </a:pPr>
+            <a:r>
+              <a:rPr sz="1300">
+                <a:solidFill>
+                  <a:srgbClr val="E5E5EC"/>
+                </a:solidFill>
+                <a:latin typeface="Consolas"/>
+              </a:rPr>
+              <a:t># sql = f"SELECT contenuto FROM messaggi WHERE contenuto LIKE '%{q}%'"</a:t>
+            </a:r>
+          </a:p>
+          <a:p>
+            <a:pPr>
+              <a:lnSpc>
+                <a:spcPct val="115000"/>
+              </a:lnSpc>
+              <a:spcAft>
+                <a:spcPts val="0"/>
+              </a:spcAft>
+            </a:pPr>
+            <a:r>
+              <a:rPr sz="1300">
+                <a:solidFill>
+                  <a:srgbClr val="E5E5EC"/>
+                </a:solidFill>
+                <a:latin typeface="Consolas"/>
+              </a:rPr>
+              <a:t> </a:t>
+            </a:r>
+          </a:p>
+          <a:p>
+            <a:pPr>
+              <a:lnSpc>
+                <a:spcPct val="115000"/>
+              </a:lnSpc>
+              <a:spcAft>
+                <a:spcPts val="0"/>
+              </a:spcAft>
+            </a:pPr>
+            <a:r>
+              <a:rPr sz="1300">
+                <a:solidFill>
+                  <a:srgbClr val="E5E5EC"/>
+                </a:solidFill>
+                <a:latin typeface="Consolas"/>
+              </a:rPr>
+              <a:t># L'attaccante cerca:</a:t>
+            </a:r>
+          </a:p>
+          <a:p>
+            <a:pPr>
+              <a:lnSpc>
+                <a:spcPct val="115000"/>
+              </a:lnSpc>
+              <a:spcAft>
+                <a:spcPts val="0"/>
+              </a:spcAft>
+            </a:pPr>
+            <a:r>
+              <a:rPr sz="1300">
+                <a:solidFill>
+                  <a:srgbClr val="E5E5EC"/>
+                </a:solidFill>
+                <a:latin typeface="Consolas"/>
+              </a:rPr>
+              <a:t>xyz' UNION SELECT email || ':' || password FROM users --</a:t>
+            </a:r>
+          </a:p>
+          <a:p>
+            <a:pPr>
+              <a:lnSpc>
+                <a:spcPct val="115000"/>
+              </a:lnSpc>
+              <a:spcAft>
+                <a:spcPts val="0"/>
+              </a:spcAft>
+            </a:pPr>
+            <a:r>
+              <a:rPr sz="1300">
+                <a:solidFill>
+                  <a:srgbClr val="E5E5EC"/>
+                </a:solidFill>
+                <a:latin typeface="Consolas"/>
+              </a:rPr>
+              <a:t> </a:t>
+            </a:r>
+          </a:p>
+          <a:p>
+            <a:pPr>
+              <a:lnSpc>
+                <a:spcPct val="115000"/>
+              </a:lnSpc>
+              <a:spcAft>
+                <a:spcPts val="0"/>
+              </a:spcAft>
+            </a:pPr>
+            <a:r>
+              <a:rPr sz="1300">
+                <a:solidFill>
+                  <a:srgbClr val="E5E5EC"/>
+                </a:solidFill>
+                <a:latin typeface="Consolas"/>
+              </a:rPr>
+              <a:t># La query diventa:</a:t>
+            </a:r>
+          </a:p>
+          <a:p>
+            <a:pPr>
+              <a:lnSpc>
+                <a:spcPct val="115000"/>
+              </a:lnSpc>
+              <a:spcAft>
+                <a:spcPts val="0"/>
+              </a:spcAft>
+            </a:pPr>
+            <a:r>
+              <a:rPr sz="1300">
+                <a:solidFill>
+                  <a:srgbClr val="E5E5EC"/>
+                </a:solidFill>
+                <a:latin typeface="Consolas"/>
+              </a:rPr>
+              <a:t># SELECT contenuto FROM messaggi WHERE contenuto LIKE</a:t>
+            </a:r>
+          </a:p>
+          <a:p>
+            <a:pPr>
+              <a:lnSpc>
+                <a:spcPct val="115000"/>
+              </a:lnSpc>
+              <a:spcAft>
+                <a:spcPts val="0"/>
+              </a:spcAft>
+            </a:pPr>
+            <a:r>
+              <a:rPr sz="1300">
+                <a:solidFill>
+                  <a:srgbClr val="E5E5EC"/>
+                </a:solidFill>
+                <a:latin typeface="Consolas"/>
+              </a:rPr>
+              <a:t>#     '%xyz' UNION SELECT email || ':' || password FROM users --%'</a:t>
+            </a:r>
+          </a:p>
+          <a:p>
+            <a:pPr>
+              <a:lnSpc>
+                <a:spcPct val="115000"/>
+              </a:lnSpc>
+              <a:spcAft>
+                <a:spcPts val="0"/>
+              </a:spcAft>
+            </a:pPr>
+            <a:r>
+              <a:rPr sz="1300">
+                <a:solidFill>
+                  <a:srgbClr val="E5E5EC"/>
+                </a:solidFill>
+                <a:latin typeface="Consolas"/>
+              </a:rPr>
+              <a:t> </a:t>
+            </a:r>
+          </a:p>
+          <a:p>
+            <a:pPr>
+              <a:lnSpc>
+                <a:spcPct val="115000"/>
+              </a:lnSpc>
+              <a:spcAft>
+                <a:spcPts val="0"/>
+              </a:spcAft>
+            </a:pPr>
+            <a:r>
+              <a:rPr sz="1300">
+                <a:solidFill>
+                  <a:srgbClr val="E5E5EC"/>
+                </a:solidFill>
+                <a:latin typeface="Consolas"/>
+              </a:rPr>
+              <a:t># L'app mostra "messaggi"... ma in realtà mostra TUTTE le password:</a:t>
+            </a:r>
+          </a:p>
+          <a:p>
+            <a:pPr>
+              <a:lnSpc>
+                <a:spcPct val="115000"/>
+              </a:lnSpc>
+              <a:spcAft>
+                <a:spcPts val="0"/>
+              </a:spcAft>
+            </a:pPr>
+            <a:r>
+              <a:rPr sz="1300">
+                <a:solidFill>
+                  <a:srgbClr val="E5E5EC"/>
+                </a:solidFill>
+                <a:latin typeface="Consolas"/>
+              </a:rPr>
+              <a:t>#   alice@bank.it:alice_pass</a:t>
+            </a:r>
+          </a:p>
+          <a:p>
+            <a:pPr>
+              <a:lnSpc>
+                <a:spcPct val="115000"/>
+              </a:lnSpc>
+              <a:spcAft>
+                <a:spcPts val="0"/>
+              </a:spcAft>
+            </a:pPr>
+            <a:r>
+              <a:rPr sz="1300">
+                <a:solidFill>
+                  <a:srgbClr val="E5E5EC"/>
+                </a:solidFill>
+                <a:latin typeface="Consolas"/>
+              </a:rPr>
+              <a:t>#   bob@bank.it:bob_pass</a:t>
+            </a:r>
+          </a:p>
+          <a:p>
+            <a:pPr>
+              <a:lnSpc>
+                <a:spcPct val="115000"/>
+              </a:lnSpc>
+              <a:spcAft>
+                <a:spcPts val="0"/>
+              </a:spcAft>
+            </a:pPr>
+            <a:r>
+              <a:rPr sz="1300">
+                <a:solidFill>
+                  <a:srgbClr val="E5E5EC"/>
+                </a:solidFill>
+                <a:latin typeface="Consolas"/>
+              </a:rPr>
+              <a:t>#   admin@bank.it:Sup3rS3gr3t0!</a:t>
+            </a:r>
+          </a:p>
+          <a:p>
+            <a:pPr>
+              <a:lnSpc>
+                <a:spcPct val="115000"/>
+              </a:lnSpc>
+              <a:spcAft>
+                <a:spcPts val="0"/>
+              </a:spcAft>
+            </a:pPr>
+            <a:r>
+              <a:rPr sz="1300">
+                <a:solidFill>
+                  <a:srgbClr val="E5E5EC"/>
+                </a:solidFill>
+                <a:latin typeface="Consolas"/>
+              </a:rPr>
+              <a:t> </a:t>
+            </a:r>
+          </a:p>
+          <a:p>
+            <a:pPr>
+              <a:lnSpc>
+                <a:spcPct val="115000"/>
+              </a:lnSpc>
+              <a:spcAft>
+                <a:spcPts val="0"/>
+              </a:spcAft>
+            </a:pPr>
+            <a:r>
+              <a:rPr sz="1300">
+                <a:solidFill>
+                  <a:srgbClr val="E5E5EC"/>
+                </a:solidFill>
+                <a:latin typeface="Consolas"/>
+              </a:rPr>
+              <a:t># In UNA richiesta: TUTTO il database password rubato.</a:t>
+            </a:r>
+          </a:p>
+        </p:txBody>
+      </p:sp>
+      <p:sp>
+        <p:nvSpPr>
+          <p:cNvPr id="14" name="TextBox 13"/>
+          <p:cNvSpPr txBox="1"/>
+          <p:nvPr/>
+        </p:nvSpPr>
+        <p:spPr>
+          <a:xfrm>
+            <a:off x="502920" y="1600200"/>
+            <a:ext cx="365760" cy="4114800"/>
+          </a:xfrm>
+          <a:prstGeom prst="rect">
+            <a:avLst/>
+          </a:prstGeom>
+          <a:noFill/>
+        </p:spPr>
+        <p:txBody>
+          <a:bodyPr wrap="none">
+            <a:spAutoFit/>
+          </a:bodyPr>
+          <a:lstStyle/>
+          <a:p>
+            <a:pPr algn="r">
+              <a:lnSpc>
+                <a:spcPct val="115000"/>
+              </a:lnSpc>
+              <a:spcAft>
+                <a:spcPts val="0"/>
+              </a:spcAft>
+            </a:pPr>
+            <a:r>
+              <a:rPr sz="1100">
+                <a:solidFill>
+                  <a:srgbClr val="6B7280"/>
+                </a:solidFill>
+                <a:latin typeface="Consolas"/>
+              </a:rPr>
+              <a:t>1</a:t>
+            </a:r>
+          </a:p>
+          <a:p>
+            <a:pPr algn="r">
+              <a:lnSpc>
+                <a:spcPct val="115000"/>
+              </a:lnSpc>
+              <a:spcAft>
+                <a:spcPts val="0"/>
+              </a:spcAft>
+            </a:pPr>
+            <a:r>
+              <a:rPr sz="1100">
+                <a:solidFill>
+                  <a:srgbClr val="6B7280"/>
+                </a:solidFill>
+                <a:latin typeface="Consolas"/>
+              </a:rPr>
+              <a:t>2</a:t>
+            </a:r>
+          </a:p>
+          <a:p>
+            <a:pPr algn="r">
+              <a:lnSpc>
+                <a:spcPct val="115000"/>
+              </a:lnSpc>
+              <a:spcAft>
+                <a:spcPts val="0"/>
+              </a:spcAft>
+            </a:pPr>
+            <a:r>
+              <a:rPr sz="1100">
+                <a:solidFill>
+                  <a:srgbClr val="6B7280"/>
+                </a:solidFill>
+                <a:latin typeface="Consolas"/>
+              </a:rPr>
+              <a:t>3</a:t>
+            </a:r>
+          </a:p>
+          <a:p>
+            <a:pPr algn="r">
+              <a:lnSpc>
+                <a:spcPct val="115000"/>
+              </a:lnSpc>
+              <a:spcAft>
+                <a:spcPts val="0"/>
+              </a:spcAft>
+            </a:pPr>
+            <a:r>
+              <a:rPr sz="1100">
+                <a:solidFill>
+                  <a:srgbClr val="6B7280"/>
+                </a:solidFill>
+                <a:latin typeface="Consolas"/>
+              </a:rPr>
+              <a:t>4</a:t>
+            </a:r>
+          </a:p>
+          <a:p>
+            <a:pPr algn="r">
+              <a:lnSpc>
+                <a:spcPct val="115000"/>
+              </a:lnSpc>
+              <a:spcAft>
+                <a:spcPts val="0"/>
+              </a:spcAft>
+            </a:pPr>
+            <a:r>
+              <a:rPr sz="1100">
+                <a:solidFill>
+                  <a:srgbClr val="6B7280"/>
+                </a:solidFill>
+                <a:latin typeface="Consolas"/>
+              </a:rPr>
+              <a:t>5</a:t>
+            </a:r>
+          </a:p>
+          <a:p>
+            <a:pPr algn="r">
+              <a:lnSpc>
+                <a:spcPct val="115000"/>
+              </a:lnSpc>
+              <a:spcAft>
+                <a:spcPts val="0"/>
+              </a:spcAft>
+            </a:pPr>
+            <a:r>
+              <a:rPr sz="1100">
+                <a:solidFill>
+                  <a:srgbClr val="6B7280"/>
+                </a:solidFill>
+                <a:latin typeface="Consolas"/>
+              </a:rPr>
+              <a:t>6</a:t>
+            </a:r>
+          </a:p>
+          <a:p>
+            <a:pPr algn="r">
+              <a:lnSpc>
+                <a:spcPct val="115000"/>
+              </a:lnSpc>
+              <a:spcAft>
+                <a:spcPts val="0"/>
+              </a:spcAft>
+            </a:pPr>
+            <a:r>
+              <a:rPr sz="1100">
+                <a:solidFill>
+                  <a:srgbClr val="6B7280"/>
+                </a:solidFill>
+                <a:latin typeface="Consolas"/>
+              </a:rPr>
+              <a:t>7</a:t>
+            </a:r>
+          </a:p>
+          <a:p>
+            <a:pPr algn="r">
+              <a:lnSpc>
+                <a:spcPct val="115000"/>
+              </a:lnSpc>
+              <a:spcAft>
+                <a:spcPts val="0"/>
+              </a:spcAft>
+            </a:pPr>
+            <a:r>
+              <a:rPr sz="1100">
+                <a:solidFill>
+                  <a:srgbClr val="6B7280"/>
+                </a:solidFill>
+                <a:latin typeface="Consolas"/>
+              </a:rPr>
+              <a:t>8</a:t>
+            </a:r>
+          </a:p>
+          <a:p>
+            <a:pPr algn="r">
+              <a:lnSpc>
+                <a:spcPct val="115000"/>
+              </a:lnSpc>
+              <a:spcAft>
+                <a:spcPts val="0"/>
+              </a:spcAft>
+            </a:pPr>
+            <a:r>
+              <a:rPr sz="1100">
+                <a:solidFill>
+                  <a:srgbClr val="6B7280"/>
+                </a:solidFill>
+                <a:latin typeface="Consolas"/>
+              </a:rPr>
+              <a:t>9</a:t>
+            </a:r>
+          </a:p>
+          <a:p>
+            <a:pPr algn="r">
+              <a:lnSpc>
+                <a:spcPct val="115000"/>
+              </a:lnSpc>
+              <a:spcAft>
+                <a:spcPts val="0"/>
+              </a:spcAft>
+            </a:pPr>
+            <a:r>
+              <a:rPr sz="1100">
+                <a:solidFill>
+                  <a:srgbClr val="6B7280"/>
+                </a:solidFill>
+                <a:latin typeface="Consolas"/>
+              </a:rPr>
+              <a:t>10</a:t>
+            </a:r>
+          </a:p>
+          <a:p>
+            <a:pPr algn="r">
+              <a:lnSpc>
+                <a:spcPct val="115000"/>
+              </a:lnSpc>
+              <a:spcAft>
+                <a:spcPts val="0"/>
+              </a:spcAft>
+            </a:pPr>
+            <a:r>
+              <a:rPr sz="1100">
+                <a:solidFill>
+                  <a:srgbClr val="6B7280"/>
+                </a:solidFill>
+                <a:latin typeface="Consolas"/>
+              </a:rPr>
+              <a:t>11</a:t>
+            </a:r>
+          </a:p>
+          <a:p>
+            <a:pPr algn="r">
+              <a:lnSpc>
+                <a:spcPct val="115000"/>
+              </a:lnSpc>
+              <a:spcAft>
+                <a:spcPts val="0"/>
+              </a:spcAft>
+            </a:pPr>
+            <a:r>
+              <a:rPr sz="1100">
+                <a:solidFill>
+                  <a:srgbClr val="6B7280"/>
+                </a:solidFill>
+                <a:latin typeface="Consolas"/>
+              </a:rPr>
+              <a:t>12</a:t>
+            </a:r>
+          </a:p>
+          <a:p>
+            <a:pPr algn="r">
+              <a:lnSpc>
+                <a:spcPct val="115000"/>
+              </a:lnSpc>
+              <a:spcAft>
+                <a:spcPts val="0"/>
+              </a:spcAft>
+            </a:pPr>
+            <a:r>
+              <a:rPr sz="1100">
+                <a:solidFill>
+                  <a:srgbClr val="6B7280"/>
+                </a:solidFill>
+                <a:latin typeface="Consolas"/>
+              </a:rPr>
+              <a:t>13</a:t>
+            </a:r>
+          </a:p>
+          <a:p>
+            <a:pPr algn="r">
+              <a:lnSpc>
+                <a:spcPct val="115000"/>
+              </a:lnSpc>
+              <a:spcAft>
+                <a:spcPts val="0"/>
+              </a:spcAft>
+            </a:pPr>
+            <a:r>
+              <a:rPr sz="1100">
+                <a:solidFill>
+                  <a:srgbClr val="6B7280"/>
+                </a:solidFill>
+                <a:latin typeface="Consolas"/>
+              </a:rPr>
+              <a:t>14</a:t>
+            </a:r>
+          </a:p>
+          <a:p>
+            <a:pPr algn="r">
+              <a:lnSpc>
+                <a:spcPct val="115000"/>
+              </a:lnSpc>
+              <a:spcAft>
+                <a:spcPts val="0"/>
+              </a:spcAft>
+            </a:pPr>
+            <a:r>
+              <a:rPr sz="1100">
+                <a:solidFill>
+                  <a:srgbClr val="6B7280"/>
+                </a:solidFill>
+                <a:latin typeface="Consolas"/>
+              </a:rPr>
+              <a:t>15</a:t>
+            </a:r>
+          </a:p>
+          <a:p>
+            <a:pPr algn="r">
+              <a:lnSpc>
+                <a:spcPct val="115000"/>
+              </a:lnSpc>
+              <a:spcAft>
+                <a:spcPts val="0"/>
+              </a:spcAft>
+            </a:pPr>
+            <a:r>
+              <a:rPr sz="1100">
+                <a:solidFill>
+                  <a:srgbClr val="6B7280"/>
+                </a:solidFill>
+                <a:latin typeface="Consolas"/>
+              </a:rPr>
+              <a:t>16</a:t>
+            </a:r>
+          </a:p>
+        </p:txBody>
+      </p:sp>
+      <p:sp>
+        <p:nvSpPr>
+          <p:cNvPr id="15" name="TextBox 14"/>
+          <p:cNvSpPr txBox="1"/>
+          <p:nvPr/>
+        </p:nvSpPr>
+        <p:spPr>
+          <a:xfrm>
+            <a:off x="457200" y="5852160"/>
+            <a:ext cx="11247120" cy="502920"/>
           </a:xfrm>
           <a:prstGeom prst="rect">
             <a:avLst/>
@@ -8522,127 +10534,22 @@
           </a:bodyPr>
           <a:lstStyle/>
           <a:p>
-            <a:pPr algn="ctr"/>
-            <a:r>
-              <a:rPr sz="17000" b="1" i="0">
-                <a:solidFill>
-                  <a:srgbClr val="00A0B0"/>
-                </a:solidFill>
-                <a:latin typeface="Calibri"/>
-              </a:rPr>
-              <a:t>02</a:t>
-            </a:r>
-          </a:p>
-        </p:txBody>
-      </p:sp>
-      <p:sp>
-        <p:nvSpPr>
-          <p:cNvPr id="6" name="TextBox 5"/>
-          <p:cNvSpPr txBox="1"/>
-          <p:nvPr/>
-        </p:nvSpPr>
-        <p:spPr>
-          <a:xfrm>
-            <a:off x="274320" y="4572000"/>
-            <a:ext cx="3657600" cy="457200"/>
-          </a:xfrm>
-          <a:prstGeom prst="rect">
-            <a:avLst/>
-          </a:prstGeom>
-          <a:noFill/>
-        </p:spPr>
-        <p:txBody>
-          <a:bodyPr wrap="square" lIns="45720" rIns="45720" tIns="18288" bIns="18288" anchor="t">
-            <a:spAutoFit/>
-          </a:bodyPr>
-          <a:lstStyle/>
-          <a:p>
-            <a:pPr algn="ctr"/>
-            <a:r>
-              <a:rPr sz="2000" b="1" i="0">
-                <a:solidFill>
-                  <a:srgbClr val="6FD8E0"/>
-                </a:solidFill>
-                <a:latin typeface="Calibri"/>
-              </a:rPr>
-              <a:t>PARTE</a:t>
-            </a:r>
-          </a:p>
-        </p:txBody>
-      </p:sp>
-      <p:sp>
-        <p:nvSpPr>
-          <p:cNvPr id="7" name="TextBox 6"/>
-          <p:cNvSpPr txBox="1"/>
-          <p:nvPr/>
-        </p:nvSpPr>
-        <p:spPr>
-          <a:xfrm>
-            <a:off x="4572000" y="2286000"/>
-            <a:ext cx="7315200" cy="1645920"/>
-          </a:xfrm>
-          <a:prstGeom prst="rect">
-            <a:avLst/>
-          </a:prstGeom>
-          <a:noFill/>
-        </p:spPr>
-        <p:txBody>
-          <a:bodyPr wrap="square" lIns="45720" rIns="45720" tIns="18288" bIns="18288" anchor="t">
-            <a:spAutoFit/>
-          </a:bodyPr>
-          <a:lstStyle/>
-          <a:p>
             <a:pPr algn="l"/>
             <a:r>
-              <a:rPr sz="4400" b="1" i="0">
-                <a:solidFill>
-                  <a:srgbClr val="0F2D52"/>
-                </a:solidFill>
-                <a:latin typeface="Calibri"/>
-              </a:rPr>
-              <a:t>La correzione</a:t>
-            </a:r>
-          </a:p>
-        </p:txBody>
-      </p:sp>
-      <p:sp>
-        <p:nvSpPr>
-          <p:cNvPr id="8" name="TextBox 7"/>
-          <p:cNvSpPr txBox="1"/>
-          <p:nvPr/>
-        </p:nvSpPr>
-        <p:spPr>
-          <a:xfrm>
-            <a:off x="4572000" y="3931920"/>
-            <a:ext cx="7315200" cy="1828800"/>
-          </a:xfrm>
-          <a:prstGeom prst="rect">
-            <a:avLst/>
-          </a:prstGeom>
-          <a:noFill/>
-        </p:spPr>
-        <p:txBody>
-          <a:bodyPr wrap="square" lIns="45720" rIns="45720" tIns="18288" bIns="18288" anchor="t">
-            <a:spAutoFit/>
-          </a:bodyPr>
-          <a:lstStyle/>
-          <a:p>
-            <a:pPr algn="l"/>
-            <a:r>
-              <a:rPr sz="1800" b="0" i="1">
-                <a:solidFill>
-                  <a:srgbClr val="6B7280"/>
-                </a:solidFill>
-                <a:latin typeface="Calibri"/>
-              </a:rPr>
-              <a:t>Separare struttura SQL da dati. Sempre.</a:t>
+              <a:rPr sz="1400" b="1" i="1">
+                <a:solidFill>
+                  <a:srgbClr val="E63946"/>
+                </a:solidFill>
+                <a:latin typeface="Calibri"/>
+              </a:rPr>
+              <a:t>⚠  Login bypass + UNION SELECT = takeover di ogni account in &lt;30 secondi</a:t>
             </a:r>
           </a:p>
         </p:txBody>
       </p:sp>
       <p:cxnSp>
         <p:nvCxnSpPr>
-          <p:cNvPr id="9" name="Connector 8"/>
+          <p:cNvPr id="16" name="Connector 15"/>
           <p:cNvCxnSpPr/>
           <p:nvPr/>
         </p:nvCxnSpPr>
@@ -8677,7 +10584,7 @@
       </p:cxnSp>
       <p:sp>
         <p:nvSpPr>
-          <p:cNvPr id="10" name="TextBox 9"/>
+          <p:cNvPr id="17" name="TextBox 16"/>
           <p:cNvSpPr txBox="1"/>
           <p:nvPr/>
         </p:nvSpPr>
@@ -8712,7 +10619,7 @@
       </p:sp>
       <p:sp>
         <p:nvSpPr>
-          <p:cNvPr id="11" name="TextBox 10"/>
+          <p:cNvPr id="18" name="TextBox 17"/>
           <p:cNvSpPr txBox="1"/>
           <p:nvPr/>
         </p:nvSpPr>
@@ -8740,7 +10647,7 @@
                 </a:solidFill>
                 <a:latin typeface="Calibri"/>
               </a:rPr>
-              <a:t>L3  ·  7/14</a:t>
+              <a:t>L3  ·  7/15</a:t>
             </a:r>
           </a:p>
         </p:txBody>
@@ -8772,13 +10679,13 @@
         <p:spPr>
           <a:xfrm>
             <a:off x="0" y="0"/>
-            <a:ext cx="12191695" cy="777240"/>
+            <a:ext cx="4114800" cy="6858000"/>
           </a:xfrm>
           <a:prstGeom prst="rect">
             <a:avLst/>
           </a:prstGeom>
           <a:solidFill>
-            <a:srgbClr val="0F2D52"/>
+            <a:srgbClr val="081B33"/>
           </a:solidFill>
           <a:ln>
             <a:noFill/>
@@ -8808,63 +10715,90 @@
       </p:sp>
       <p:sp>
         <p:nvSpPr>
-          <p:cNvPr id="3" name="TextBox 2"/>
-          <p:cNvSpPr txBox="1"/>
-          <p:nvPr/>
-        </p:nvSpPr>
-        <p:spPr>
-          <a:xfrm>
-            <a:off x="457200" y="164592"/>
-            <a:ext cx="10972800" cy="502920"/>
-          </a:xfrm>
-          <a:prstGeom prst="rect">
-            <a:avLst/>
-          </a:prstGeom>
-          <a:noFill/>
-        </p:spPr>
-        <p:txBody>
-          <a:bodyPr wrap="square" lIns="45720" rIns="45720" tIns="18288" bIns="18288" anchor="ctr">
-            <a:spAutoFit/>
-          </a:bodyPr>
-          <a:lstStyle/>
-          <a:p>
-            <a:pPr algn="l"/>
-            <a:r>
-              <a:rPr sz="2400" b="1" i="0">
-                <a:solidFill>
-                  <a:srgbClr val="FFFFFF"/>
-                </a:solidFill>
-                <a:latin typeface="Calibri"/>
-              </a:rPr>
-              <a:t>Versione corretta</a:t>
-            </a:r>
-          </a:p>
-        </p:txBody>
-      </p:sp>
-      <p:pic>
-        <p:nvPicPr>
-          <p:cNvPr id="4" name="Picture 3" descr="cap3_sqli_safe.png"/>
-          <p:cNvPicPr>
-            <a:picLocks noChangeAspect="1"/>
-          </p:cNvPicPr>
-          <p:nvPr/>
-        </p:nvPicPr>
-        <p:blipFill>
-          <a:blip r:embed="rId2"/>
-          <a:stretch>
-            <a:fillRect/>
-          </a:stretch>
-        </p:blipFill>
-        <p:spPr>
-          <a:xfrm>
-            <a:off x="640080" y="1097280"/>
-            <a:ext cx="10881360" cy="4572000"/>
-          </a:xfrm>
-          <a:prstGeom prst="rect">
-            <a:avLst/>
-          </a:prstGeom>
-        </p:spPr>
-      </p:pic>
+          <p:cNvPr id="3" name="Rectangle 2"/>
+          <p:cNvSpPr/>
+          <p:nvPr/>
+        </p:nvSpPr>
+        <p:spPr>
+          <a:xfrm>
+            <a:off x="4114800" y="0"/>
+            <a:ext cx="8046720" cy="6858000"/>
+          </a:xfrm>
+          <a:prstGeom prst="rect">
+            <a:avLst/>
+          </a:prstGeom>
+          <a:solidFill>
+            <a:srgbClr val="F1F4F8"/>
+          </a:solidFill>
+          <a:ln>
+            <a:noFill/>
+          </a:ln>
+        </p:spPr>
+        <p:style>
+          <a:lnRef idx="1">
+            <a:schemeClr val="accent1"/>
+          </a:lnRef>
+          <a:fillRef idx="3">
+            <a:schemeClr val="accent1"/>
+          </a:fillRef>
+          <a:effectRef idx="2">
+            <a:schemeClr val="accent1"/>
+          </a:effectRef>
+          <a:fontRef idx="minor">
+            <a:schemeClr val="lt1"/>
+          </a:fontRef>
+        </p:style>
+        <p:txBody>
+          <a:bodyPr rtlCol="0" anchor="ctr"/>
+          <a:lstStyle/>
+          <a:p>
+            <a:pPr algn="ctr"/>
+          </a:p>
+        </p:txBody>
+      </p:sp>
+      <p:sp>
+        <p:nvSpPr>
+          <p:cNvPr id="4" name="Rectangle 3"/>
+          <p:cNvSpPr/>
+          <p:nvPr/>
+        </p:nvSpPr>
+        <p:spPr>
+          <a:xfrm>
+            <a:off x="4114800" y="0"/>
+            <a:ext cx="137160" cy="6858000"/>
+          </a:xfrm>
+          <a:prstGeom prst="rect">
+            <a:avLst/>
+          </a:prstGeom>
+          <a:solidFill>
+            <a:srgbClr val="00A0B0"/>
+          </a:solidFill>
+          <a:ln>
+            <a:noFill/>
+          </a:ln>
+        </p:spPr>
+        <p:style>
+          <a:lnRef idx="1">
+            <a:schemeClr val="accent1"/>
+          </a:lnRef>
+          <a:fillRef idx="3">
+            <a:schemeClr val="accent1"/>
+          </a:fillRef>
+          <a:effectRef idx="2">
+            <a:schemeClr val="accent1"/>
+          </a:effectRef>
+          <a:fontRef idx="minor">
+            <a:schemeClr val="lt1"/>
+          </a:fontRef>
+        </p:style>
+        <p:txBody>
+          <a:bodyPr rtlCol="0" anchor="ctr"/>
+          <a:lstStyle/>
+          <a:p>
+            <a:pPr algn="ctr"/>
+          </a:p>
+        </p:txBody>
+      </p:sp>
       <p:sp>
         <p:nvSpPr>
           <p:cNvPr id="5" name="TextBox 4"/>
@@ -8873,8 +10807,8 @@
         </p:nvSpPr>
         <p:spPr>
           <a:xfrm>
-            <a:off x="457200" y="5852160"/>
-            <a:ext cx="11247120" cy="365760"/>
+            <a:off x="274320" y="2103120"/>
+            <a:ext cx="3657600" cy="2286000"/>
           </a:xfrm>
           <a:prstGeom prst="rect">
             <a:avLst/>
@@ -8889,20 +10823,125 @@
           <a:p>
             <a:pPr algn="ctr"/>
             <a:r>
-              <a:rPr sz="1300" b="0" i="1">
+              <a:rPr sz="17000" b="1" i="0">
+                <a:solidFill>
+                  <a:srgbClr val="00A0B0"/>
+                </a:solidFill>
+                <a:latin typeface="Calibri"/>
+              </a:rPr>
+              <a:t>02</a:t>
+            </a:r>
+          </a:p>
+        </p:txBody>
+      </p:sp>
+      <p:sp>
+        <p:nvSpPr>
+          <p:cNvPr id="6" name="TextBox 5"/>
+          <p:cNvSpPr txBox="1"/>
+          <p:nvPr/>
+        </p:nvSpPr>
+        <p:spPr>
+          <a:xfrm>
+            <a:off x="274320" y="4572000"/>
+            <a:ext cx="3657600" cy="457200"/>
+          </a:xfrm>
+          <a:prstGeom prst="rect">
+            <a:avLst/>
+          </a:prstGeom>
+          <a:noFill/>
+        </p:spPr>
+        <p:txBody>
+          <a:bodyPr wrap="square" lIns="45720" rIns="45720" tIns="18288" bIns="18288" anchor="t">
+            <a:spAutoFit/>
+          </a:bodyPr>
+          <a:lstStyle/>
+          <a:p>
+            <a:pPr algn="ctr"/>
+            <a:r>
+              <a:rPr sz="2000" b="1" i="0">
+                <a:solidFill>
+                  <a:srgbClr val="6FD8E0"/>
+                </a:solidFill>
+                <a:latin typeface="Calibri"/>
+              </a:rPr>
+              <a:t>PARTE</a:t>
+            </a:r>
+          </a:p>
+        </p:txBody>
+      </p:sp>
+      <p:sp>
+        <p:nvSpPr>
+          <p:cNvPr id="7" name="TextBox 6"/>
+          <p:cNvSpPr txBox="1"/>
+          <p:nvPr/>
+        </p:nvSpPr>
+        <p:spPr>
+          <a:xfrm>
+            <a:off x="4572000" y="2286000"/>
+            <a:ext cx="7315200" cy="1645920"/>
+          </a:xfrm>
+          <a:prstGeom prst="rect">
+            <a:avLst/>
+          </a:prstGeom>
+          <a:noFill/>
+        </p:spPr>
+        <p:txBody>
+          <a:bodyPr wrap="square" lIns="45720" rIns="45720" tIns="18288" bIns="18288" anchor="t">
+            <a:spAutoFit/>
+          </a:bodyPr>
+          <a:lstStyle/>
+          <a:p>
+            <a:pPr algn="l"/>
+            <a:r>
+              <a:rPr sz="4400" b="1" i="0">
+                <a:solidFill>
+                  <a:srgbClr val="0F2D52"/>
+                </a:solidFill>
+                <a:latin typeface="Calibri"/>
+              </a:rPr>
+              <a:t>La correzione</a:t>
+            </a:r>
+          </a:p>
+        </p:txBody>
+      </p:sp>
+      <p:sp>
+        <p:nvSpPr>
+          <p:cNvPr id="8" name="TextBox 7"/>
+          <p:cNvSpPr txBox="1"/>
+          <p:nvPr/>
+        </p:nvSpPr>
+        <p:spPr>
+          <a:xfrm>
+            <a:off x="4572000" y="3931920"/>
+            <a:ext cx="7315200" cy="1828800"/>
+          </a:xfrm>
+          <a:prstGeom prst="rect">
+            <a:avLst/>
+          </a:prstGeom>
+          <a:noFill/>
+        </p:spPr>
+        <p:txBody>
+          <a:bodyPr wrap="square" lIns="45720" rIns="45720" tIns="18288" bIns="18288" anchor="t">
+            <a:spAutoFit/>
+          </a:bodyPr>
+          <a:lstStyle/>
+          <a:p>
+            <a:pPr algn="l"/>
+            <a:r>
+              <a:rPr sz="1800" b="0" i="1">
                 <a:solidFill>
                   <a:srgbClr val="6B7280"/>
                 </a:solidFill>
                 <a:latin typeface="Calibri"/>
               </a:rPr>
-              <a:t>Query parametrizzata: il driver tratta i dati come VALORI, mai come SQL</a:t>
+              <a:t>Separare struttura SQL da dati. Sempre.</a:t>
             </a:r>
           </a:p>
         </p:txBody>
       </p:sp>
       <p:cxnSp>
         <p:nvCxnSpPr>
-          <p:cNvPr id="6" name="Connector 5"/>
+          <p:cNvPr id="9" name="Connector 8"/>
           <p:cNvCxnSpPr/>
           <p:nvPr/>
         </p:nvCxnSpPr>
@@ -8937,7 +10976,7 @@
       </p:cxnSp>
       <p:sp>
         <p:nvSpPr>
-          <p:cNvPr id="7" name="TextBox 6"/>
+          <p:cNvPr id="10" name="TextBox 9"/>
           <p:cNvSpPr txBox="1"/>
           <p:nvPr/>
         </p:nvSpPr>
@@ -8972,7 +11011,7 @@
       </p:sp>
       <p:sp>
         <p:nvSpPr>
-          <p:cNvPr id="8" name="TextBox 7"/>
+          <p:cNvPr id="11" name="TextBox 10"/>
           <p:cNvSpPr txBox="1"/>
           <p:nvPr/>
         </p:nvSpPr>
@@ -9000,7 +11039,7 @@
                 </a:solidFill>
                 <a:latin typeface="Calibri"/>
               </a:rPr>
-              <a:t>L3  ·  8/14</a:t>
+              <a:t>L3  ·  8/15</a:t>
             </a:r>
           </a:p>
         </p:txBody>
@@ -9096,56 +11135,35 @@
                 </a:solidFill>
                 <a:latin typeface="Calibri"/>
               </a:rPr>
-              <a:t>Filtrare gli apici NON funziona</a:t>
-            </a:r>
-          </a:p>
-        </p:txBody>
-      </p:sp>
-      <p:sp>
-        <p:nvSpPr>
-          <p:cNvPr id="4" name="Rounded Rectangle 3"/>
-          <p:cNvSpPr/>
-          <p:nvPr/>
-        </p:nvSpPr>
-        <p:spPr>
-          <a:xfrm>
-            <a:off x="457200" y="1051560"/>
-            <a:ext cx="5486400" cy="640080"/>
-          </a:xfrm>
-          <a:prstGeom prst="roundRect">
-            <a:avLst>
-              <a:gd name="adj" fmla="val 8000"/>
-            </a:avLst>
-          </a:prstGeom>
-          <a:solidFill>
-            <a:srgbClr val="E63946"/>
-          </a:solidFill>
-          <a:ln>
-            <a:noFill/>
-          </a:ln>
-        </p:spPr>
-        <p:style>
-          <a:lnRef idx="1">
-            <a:schemeClr val="accent1"/>
-          </a:lnRef>
-          <a:fillRef idx="3">
-            <a:schemeClr val="accent1"/>
-          </a:fillRef>
-          <a:effectRef idx="2">
-            <a:schemeClr val="accent1"/>
-          </a:effectRef>
-          <a:fontRef idx="minor">
-            <a:schemeClr val="lt1"/>
-          </a:fontRef>
-        </p:style>
-        <p:txBody>
-          <a:bodyPr rtlCol="0" anchor="ctr"/>
-          <a:lstStyle/>
-          <a:p>
-            <a:pPr algn="ctr"/>
-          </a:p>
-        </p:txBody>
-      </p:sp>
+              <a:t>Versione corretta</a:t>
+            </a:r>
+          </a:p>
+        </p:txBody>
+      </p:sp>
+      <p:pic>
+        <p:nvPicPr>
+          <p:cNvPr id="4" name="Picture 3" descr="cap3_sqli_safe.png"/>
+          <p:cNvPicPr>
+            <a:picLocks noChangeAspect="1"/>
+          </p:cNvPicPr>
+          <p:nvPr/>
+        </p:nvPicPr>
+        <p:blipFill>
+          <a:blip r:embed="rId2"/>
+          <a:stretch>
+            <a:fillRect/>
+          </a:stretch>
+        </p:blipFill>
+        <p:spPr>
+          <a:xfrm>
+            <a:off x="640080" y="1097280"/>
+            <a:ext cx="10881360" cy="4572000"/>
+          </a:xfrm>
+          <a:prstGeom prst="rect">
+            <a:avLst/>
+          </a:prstGeom>
+        </p:spPr>
+      </p:pic>
       <p:sp>
         <p:nvSpPr>
           <p:cNvPr id="5" name="TextBox 4"/>
@@ -9154,8 +11172,8 @@
         </p:nvSpPr>
         <p:spPr>
           <a:xfrm>
-            <a:off x="457200" y="1051560"/>
-            <a:ext cx="5486400" cy="640080"/>
+            <a:off x="457200" y="5852160"/>
+            <a:ext cx="11247120" cy="365760"/>
           </a:xfrm>
           <a:prstGeom prst="rect">
             <a:avLst/>
@@ -9163,779 +11181,27 @@
           <a:noFill/>
         </p:spPr>
         <p:txBody>
-          <a:bodyPr wrap="square" lIns="45720" rIns="45720" tIns="18288" bIns="18288" anchor="ctr">
+          <a:bodyPr wrap="square" lIns="45720" rIns="45720" tIns="18288" bIns="18288" anchor="t">
             <a:spAutoFit/>
           </a:bodyPr>
           <a:lstStyle/>
           <a:p>
             <a:pPr algn="ctr"/>
             <a:r>
-              <a:rPr sz="1800" b="1" i="0">
-                <a:solidFill>
-                  <a:srgbClr val="FFFFFF"/>
-                </a:solidFill>
-                <a:latin typeface="Calibri"/>
-              </a:rPr>
-              <a:t>Tentativo ingenuo</a:t>
-            </a:r>
-          </a:p>
-        </p:txBody>
-      </p:sp>
-      <p:sp>
-        <p:nvSpPr>
-          <p:cNvPr id="6" name="Rounded Rectangle 5"/>
-          <p:cNvSpPr/>
-          <p:nvPr/>
-        </p:nvSpPr>
-        <p:spPr>
-          <a:xfrm>
-            <a:off x="457200" y="1737360"/>
-            <a:ext cx="5486400" cy="4572000"/>
-          </a:xfrm>
-          <a:prstGeom prst="roundRect">
-            <a:avLst>
-              <a:gd name="adj" fmla="val 8000"/>
-            </a:avLst>
-          </a:prstGeom>
-          <a:solidFill>
-            <a:srgbClr val="FBFBFD"/>
-          </a:solidFill>
-          <a:ln w="25400">
-            <a:solidFill>
-              <a:srgbClr val="E63946"/>
-            </a:solidFill>
-          </a:ln>
-        </p:spPr>
-        <p:style>
-          <a:lnRef idx="1">
-            <a:schemeClr val="accent1"/>
-          </a:lnRef>
-          <a:fillRef idx="3">
-            <a:schemeClr val="accent1"/>
-          </a:fillRef>
-          <a:effectRef idx="2">
-            <a:schemeClr val="accent1"/>
-          </a:effectRef>
-          <a:fontRef idx="minor">
-            <a:schemeClr val="lt1"/>
-          </a:fontRef>
-        </p:style>
-        <p:txBody>
-          <a:bodyPr rtlCol="0" anchor="ctr"/>
-          <a:lstStyle/>
-          <a:p>
-            <a:pPr algn="ctr"/>
-          </a:p>
-        </p:txBody>
-      </p:sp>
-      <p:sp>
-        <p:nvSpPr>
-          <p:cNvPr id="7" name="TextBox 6"/>
-          <p:cNvSpPr txBox="1"/>
-          <p:nvPr/>
-        </p:nvSpPr>
-        <p:spPr>
-          <a:xfrm>
-            <a:off x="640080" y="1874519"/>
-            <a:ext cx="5120640" cy="4572000"/>
-          </a:xfrm>
-          <a:prstGeom prst="rect">
-            <a:avLst/>
-          </a:prstGeom>
-          <a:noFill/>
-        </p:spPr>
-        <p:txBody>
-          <a:bodyPr wrap="square">
-            <a:spAutoFit/>
-          </a:bodyPr>
-          <a:lstStyle/>
-          <a:p>
-            <a:pPr>
-              <a:lnSpc>
-                <a:spcPct val="150000"/>
-              </a:lnSpc>
-              <a:spcAft>
-                <a:spcPts val="400"/>
-              </a:spcAft>
-            </a:pPr>
-            <a:r>
-              <a:rPr sz="1500" b="1">
-                <a:solidFill>
-                  <a:srgbClr val="E63946"/>
-                </a:solidFill>
-                <a:latin typeface="Calibri"/>
-              </a:rPr>
-              <a:t>▸  </a:t>
-            </a:r>
-            <a:r>
-              <a:rPr sz="1500">
-                <a:solidFill>
-                  <a:srgbClr val="1A1A2E"/>
-                </a:solidFill>
-                <a:latin typeface="Calibri"/>
-              </a:rPr>
-              <a:t>s = s.replace("'", "")</a:t>
-            </a:r>
-          </a:p>
-          <a:p>
-            <a:pPr>
-              <a:lnSpc>
-                <a:spcPct val="150000"/>
-              </a:lnSpc>
-              <a:spcAft>
-                <a:spcPts val="400"/>
-              </a:spcAft>
-            </a:pPr>
-            <a:r>
-              <a:rPr sz="1500" b="1">
-                <a:solidFill>
-                  <a:srgbClr val="E63946"/>
-                </a:solidFill>
-                <a:latin typeface="Calibri"/>
-              </a:rPr>
-              <a:t>▸  </a:t>
-            </a:r>
-            <a:r>
-              <a:rPr sz="1500">
-                <a:solidFill>
-                  <a:srgbClr val="1A1A2E"/>
-                </a:solidFill>
-                <a:latin typeface="Calibri"/>
-              </a:rPr>
-              <a:t>Sembra di essere protetti...</a:t>
-            </a:r>
-          </a:p>
-          <a:p>
-            <a:pPr>
-              <a:lnSpc>
-                <a:spcPct val="150000"/>
-              </a:lnSpc>
-              <a:spcAft>
-                <a:spcPts val="400"/>
-              </a:spcAft>
-            </a:pPr>
-            <a:r>
-              <a:rPr sz="1500" b="1">
-                <a:solidFill>
-                  <a:srgbClr val="E63946"/>
-                </a:solidFill>
-                <a:latin typeface="Calibri"/>
-              </a:rPr>
-              <a:t>▸  </a:t>
-            </a:r>
-            <a:r>
-              <a:rPr sz="1500">
-                <a:solidFill>
-                  <a:srgbClr val="1A1A2E"/>
-                </a:solidFill>
-                <a:latin typeface="Calibri"/>
-              </a:rPr>
-              <a:t/>
-            </a:r>
-          </a:p>
-          <a:p>
-            <a:pPr>
-              <a:lnSpc>
-                <a:spcPct val="150000"/>
-              </a:lnSpc>
-              <a:spcAft>
-                <a:spcPts val="400"/>
-              </a:spcAft>
-            </a:pPr>
-            <a:r>
-              <a:rPr sz="1500" b="1">
-                <a:solidFill>
-                  <a:srgbClr val="E63946"/>
-                </a:solidFill>
-                <a:latin typeface="Calibri"/>
-              </a:rPr>
-              <a:t>▸  </a:t>
-            </a:r>
-            <a:r>
-              <a:rPr sz="1500">
-                <a:solidFill>
-                  <a:srgbClr val="1A1A2E"/>
-                </a:solidFill>
-                <a:latin typeface="Calibri"/>
-              </a:rPr>
-              <a:t>Bypass:</a:t>
-            </a:r>
-          </a:p>
-          <a:p>
-            <a:pPr>
-              <a:lnSpc>
-                <a:spcPct val="150000"/>
-              </a:lnSpc>
-              <a:spcAft>
-                <a:spcPts val="400"/>
-              </a:spcAft>
-            </a:pPr>
-            <a:r>
-              <a:rPr sz="1500" b="1">
-                <a:solidFill>
-                  <a:srgbClr val="E63946"/>
-                </a:solidFill>
-                <a:latin typeface="Calibri"/>
-              </a:rPr>
-              <a:t>▸  </a:t>
-            </a:r>
-            <a:r>
-              <a:rPr sz="1500">
-                <a:solidFill>
-                  <a:srgbClr val="1A1A2E"/>
-                </a:solidFill>
-                <a:latin typeface="Calibri"/>
-              </a:rPr>
-              <a:t>  %27 (URL encoded)</a:t>
-            </a:r>
-          </a:p>
-          <a:p>
-            <a:pPr>
-              <a:lnSpc>
-                <a:spcPct val="150000"/>
-              </a:lnSpc>
-              <a:spcAft>
-                <a:spcPts val="400"/>
-              </a:spcAft>
-            </a:pPr>
-            <a:r>
-              <a:rPr sz="1500" b="1">
-                <a:solidFill>
-                  <a:srgbClr val="E63946"/>
-                </a:solidFill>
-                <a:latin typeface="Calibri"/>
-              </a:rPr>
-              <a:t>▸  </a:t>
-            </a:r>
-            <a:r>
-              <a:rPr sz="1500">
-                <a:solidFill>
-                  <a:srgbClr val="1A1A2E"/>
-                </a:solidFill>
-                <a:latin typeface="Calibri"/>
-              </a:rPr>
-              <a:t>  \\' (escape)</a:t>
-            </a:r>
-          </a:p>
-          <a:p>
-            <a:pPr>
-              <a:lnSpc>
-                <a:spcPct val="150000"/>
-              </a:lnSpc>
-              <a:spcAft>
-                <a:spcPts val="400"/>
-              </a:spcAft>
-            </a:pPr>
-            <a:r>
-              <a:rPr sz="1500" b="1">
-                <a:solidFill>
-                  <a:srgbClr val="E63946"/>
-                </a:solidFill>
-                <a:latin typeface="Calibri"/>
-              </a:rPr>
-              <a:t>▸  </a:t>
-            </a:r>
-            <a:r>
-              <a:rPr sz="1500">
-                <a:solidFill>
-                  <a:srgbClr val="1A1A2E"/>
-                </a:solidFill>
-                <a:latin typeface="Calibri"/>
-              </a:rPr>
-              <a:t>  " (doppi apici)</a:t>
-            </a:r>
-          </a:p>
-          <a:p>
-            <a:pPr>
-              <a:lnSpc>
-                <a:spcPct val="150000"/>
-              </a:lnSpc>
-              <a:spcAft>
-                <a:spcPts val="400"/>
-              </a:spcAft>
-            </a:pPr>
-            <a:r>
-              <a:rPr sz="1500" b="1">
-                <a:solidFill>
-                  <a:srgbClr val="E63946"/>
-                </a:solidFill>
-                <a:latin typeface="Calibri"/>
-              </a:rPr>
-              <a:t>▸  </a:t>
-            </a:r>
-            <a:r>
-              <a:rPr sz="1500">
-                <a:solidFill>
-                  <a:srgbClr val="1A1A2E"/>
-                </a:solidFill>
-                <a:latin typeface="Calibri"/>
-              </a:rPr>
-              <a:t>  ʼ (Unicode lookalike)</a:t>
-            </a:r>
-          </a:p>
-          <a:p>
-            <a:pPr>
-              <a:lnSpc>
-                <a:spcPct val="150000"/>
-              </a:lnSpc>
-              <a:spcAft>
-                <a:spcPts val="400"/>
-              </a:spcAft>
-            </a:pPr>
-            <a:r>
-              <a:rPr sz="1500" b="1">
-                <a:solidFill>
-                  <a:srgbClr val="E63946"/>
-                </a:solidFill>
-                <a:latin typeface="Calibri"/>
-              </a:rPr>
-              <a:t>▸  </a:t>
-            </a:r>
-            <a:r>
-              <a:rPr sz="1500">
-                <a:solidFill>
-                  <a:srgbClr val="1A1A2E"/>
-                </a:solidFill>
-                <a:latin typeface="Calibri"/>
-              </a:rPr>
-              <a:t>  1 OR 1=1 (numerica)</a:t>
-            </a:r>
-          </a:p>
-        </p:txBody>
-      </p:sp>
-      <p:sp>
-        <p:nvSpPr>
-          <p:cNvPr id="8" name="Rounded Rectangle 7"/>
-          <p:cNvSpPr/>
-          <p:nvPr/>
-        </p:nvSpPr>
-        <p:spPr>
-          <a:xfrm>
-            <a:off x="6217920" y="1051560"/>
-            <a:ext cx="5486400" cy="640080"/>
-          </a:xfrm>
-          <a:prstGeom prst="roundRect">
-            <a:avLst>
-              <a:gd name="adj" fmla="val 8000"/>
-            </a:avLst>
-          </a:prstGeom>
-          <a:solidFill>
-            <a:srgbClr val="06A77D"/>
-          </a:solidFill>
-          <a:ln>
-            <a:noFill/>
-          </a:ln>
-        </p:spPr>
-        <p:style>
-          <a:lnRef idx="1">
-            <a:schemeClr val="accent1"/>
-          </a:lnRef>
-          <a:fillRef idx="3">
-            <a:schemeClr val="accent1"/>
-          </a:fillRef>
-          <a:effectRef idx="2">
-            <a:schemeClr val="accent1"/>
-          </a:effectRef>
-          <a:fontRef idx="minor">
-            <a:schemeClr val="lt1"/>
-          </a:fontRef>
-        </p:style>
-        <p:txBody>
-          <a:bodyPr rtlCol="0" anchor="ctr"/>
-          <a:lstStyle/>
-          <a:p>
-            <a:pPr algn="ctr"/>
-          </a:p>
-        </p:txBody>
-      </p:sp>
-      <p:sp>
-        <p:nvSpPr>
-          <p:cNvPr id="9" name="TextBox 8"/>
-          <p:cNvSpPr txBox="1"/>
-          <p:nvPr/>
-        </p:nvSpPr>
-        <p:spPr>
-          <a:xfrm>
-            <a:off x="6217920" y="1051560"/>
-            <a:ext cx="5486400" cy="640080"/>
-          </a:xfrm>
-          <a:prstGeom prst="rect">
-            <a:avLst/>
-          </a:prstGeom>
-          <a:noFill/>
-        </p:spPr>
-        <p:txBody>
-          <a:bodyPr wrap="square" lIns="45720" rIns="45720" tIns="18288" bIns="18288" anchor="ctr">
-            <a:spAutoFit/>
-          </a:bodyPr>
-          <a:lstStyle/>
-          <a:p>
-            <a:pPr algn="ctr"/>
-            <a:r>
-              <a:rPr sz="1800" b="1" i="0">
-                <a:solidFill>
-                  <a:srgbClr val="FFFFFF"/>
-                </a:solidFill>
-                <a:latin typeface="Calibri"/>
-              </a:rPr>
-              <a:t>Soluzione corretta</a:t>
-            </a:r>
-          </a:p>
-        </p:txBody>
-      </p:sp>
-      <p:sp>
-        <p:nvSpPr>
-          <p:cNvPr id="10" name="Rounded Rectangle 9"/>
-          <p:cNvSpPr/>
-          <p:nvPr/>
-        </p:nvSpPr>
-        <p:spPr>
-          <a:xfrm>
-            <a:off x="6217920" y="1737360"/>
-            <a:ext cx="5486400" cy="4572000"/>
-          </a:xfrm>
-          <a:prstGeom prst="roundRect">
-            <a:avLst>
-              <a:gd name="adj" fmla="val 8000"/>
-            </a:avLst>
-          </a:prstGeom>
-          <a:solidFill>
-            <a:srgbClr val="FBFBFD"/>
-          </a:solidFill>
-          <a:ln w="25400">
-            <a:solidFill>
-              <a:srgbClr val="06A77D"/>
-            </a:solidFill>
-          </a:ln>
-        </p:spPr>
-        <p:style>
-          <a:lnRef idx="1">
-            <a:schemeClr val="accent1"/>
-          </a:lnRef>
-          <a:fillRef idx="3">
-            <a:schemeClr val="accent1"/>
-          </a:fillRef>
-          <a:effectRef idx="2">
-            <a:schemeClr val="accent1"/>
-          </a:effectRef>
-          <a:fontRef idx="minor">
-            <a:schemeClr val="lt1"/>
-          </a:fontRef>
-        </p:style>
-        <p:txBody>
-          <a:bodyPr rtlCol="0" anchor="ctr"/>
-          <a:lstStyle/>
-          <a:p>
-            <a:pPr algn="ctr"/>
-          </a:p>
-        </p:txBody>
-      </p:sp>
-      <p:sp>
-        <p:nvSpPr>
-          <p:cNvPr id="11" name="TextBox 10"/>
-          <p:cNvSpPr txBox="1"/>
-          <p:nvPr/>
-        </p:nvSpPr>
-        <p:spPr>
-          <a:xfrm>
-            <a:off x="6400800" y="1874519"/>
-            <a:ext cx="5120640" cy="4572000"/>
-          </a:xfrm>
-          <a:prstGeom prst="rect">
-            <a:avLst/>
-          </a:prstGeom>
-          <a:noFill/>
-        </p:spPr>
-        <p:txBody>
-          <a:bodyPr wrap="square">
-            <a:spAutoFit/>
-          </a:bodyPr>
-          <a:lstStyle/>
-          <a:p>
-            <a:pPr>
-              <a:lnSpc>
-                <a:spcPct val="150000"/>
-              </a:lnSpc>
-              <a:spcAft>
-                <a:spcPts val="400"/>
-              </a:spcAft>
-            </a:pPr>
-            <a:r>
-              <a:rPr sz="1500" b="1">
-                <a:solidFill>
-                  <a:srgbClr val="06A77D"/>
-                </a:solidFill>
-                <a:latin typeface="Calibri"/>
-              </a:rPr>
-              <a:t>▸  </a:t>
-            </a:r>
-            <a:r>
-              <a:rPr sz="1500">
-                <a:solidFill>
-                  <a:srgbClr val="1A1A2E"/>
-                </a:solidFill>
-                <a:latin typeface="Calibri"/>
-              </a:rPr>
-              <a:t>Query parametrizzate</a:t>
-            </a:r>
-          </a:p>
-          <a:p>
-            <a:pPr>
-              <a:lnSpc>
-                <a:spcPct val="150000"/>
-              </a:lnSpc>
-              <a:spcAft>
-                <a:spcPts val="400"/>
-              </a:spcAft>
-            </a:pPr>
-            <a:r>
-              <a:rPr sz="1500" b="1">
-                <a:solidFill>
-                  <a:srgbClr val="06A77D"/>
-                </a:solidFill>
-                <a:latin typeface="Calibri"/>
-              </a:rPr>
-              <a:t>▸  </a:t>
-            </a:r>
-            <a:r>
-              <a:rPr sz="1500">
-                <a:solidFill>
-                  <a:srgbClr val="1A1A2E"/>
-                </a:solidFill>
-                <a:latin typeface="Calibri"/>
-              </a:rPr>
-              <a:t>Separi STRUTTURA da DATI</a:t>
-            </a:r>
-          </a:p>
-          <a:p>
-            <a:pPr>
-              <a:lnSpc>
-                <a:spcPct val="150000"/>
-              </a:lnSpc>
-              <a:spcAft>
-                <a:spcPts val="400"/>
-              </a:spcAft>
-            </a:pPr>
-            <a:r>
-              <a:rPr sz="1500" b="1">
-                <a:solidFill>
-                  <a:srgbClr val="06A77D"/>
-                </a:solidFill>
-                <a:latin typeface="Calibri"/>
-              </a:rPr>
-              <a:t>▸  </a:t>
-            </a:r>
-            <a:r>
-              <a:rPr sz="1500">
-                <a:solidFill>
-                  <a:srgbClr val="1A1A2E"/>
-                </a:solidFill>
-                <a:latin typeface="Calibri"/>
-              </a:rPr>
-              <a:t/>
-            </a:r>
-          </a:p>
-          <a:p>
-            <a:pPr>
-              <a:lnSpc>
-                <a:spcPct val="150000"/>
-              </a:lnSpc>
-              <a:spcAft>
-                <a:spcPts val="400"/>
-              </a:spcAft>
-            </a:pPr>
-            <a:r>
-              <a:rPr sz="1500" b="1">
-                <a:solidFill>
-                  <a:srgbClr val="06A77D"/>
-                </a:solidFill>
-                <a:latin typeface="Calibri"/>
-              </a:rPr>
-              <a:t>▸  </a:t>
-            </a:r>
-            <a:r>
-              <a:rPr sz="1500">
-                <a:solidFill>
-                  <a:srgbClr val="1A1A2E"/>
-                </a:solidFill>
-                <a:latin typeface="Calibri"/>
-              </a:rPr>
-              <a:t>Il driver tratta i dati</a:t>
-            </a:r>
-          </a:p>
-          <a:p>
-            <a:pPr>
-              <a:lnSpc>
-                <a:spcPct val="150000"/>
-              </a:lnSpc>
-              <a:spcAft>
-                <a:spcPts val="400"/>
-              </a:spcAft>
-            </a:pPr>
-            <a:r>
-              <a:rPr sz="1500" b="1">
-                <a:solidFill>
-                  <a:srgbClr val="06A77D"/>
-                </a:solidFill>
-                <a:latin typeface="Calibri"/>
-              </a:rPr>
-              <a:t>▸  </a:t>
-            </a:r>
-            <a:r>
-              <a:rPr sz="1500">
-                <a:solidFill>
-                  <a:srgbClr val="1A1A2E"/>
-                </a:solidFill>
-                <a:latin typeface="Calibri"/>
-              </a:rPr>
-              <a:t>come VALORI, mai come SQL</a:t>
-            </a:r>
-          </a:p>
-          <a:p>
-            <a:pPr>
-              <a:lnSpc>
-                <a:spcPct val="150000"/>
-              </a:lnSpc>
-              <a:spcAft>
-                <a:spcPts val="400"/>
-              </a:spcAft>
-            </a:pPr>
-            <a:r>
-              <a:rPr sz="1500" b="1">
-                <a:solidFill>
-                  <a:srgbClr val="06A77D"/>
-                </a:solidFill>
-                <a:latin typeface="Calibri"/>
-              </a:rPr>
-              <a:t>▸  </a:t>
-            </a:r>
-            <a:r>
-              <a:rPr sz="1500">
-                <a:solidFill>
-                  <a:srgbClr val="1A1A2E"/>
-                </a:solidFill>
-                <a:latin typeface="Calibri"/>
-              </a:rPr>
-              <a:t/>
-            </a:r>
-          </a:p>
-          <a:p>
-            <a:pPr>
-              <a:lnSpc>
-                <a:spcPct val="150000"/>
-              </a:lnSpc>
-              <a:spcAft>
-                <a:spcPts val="400"/>
-              </a:spcAft>
-            </a:pPr>
-            <a:r>
-              <a:rPr sz="1500" b="1">
-                <a:solidFill>
-                  <a:srgbClr val="06A77D"/>
-                </a:solidFill>
-                <a:latin typeface="Calibri"/>
-              </a:rPr>
-              <a:t>▸  </a:t>
-            </a:r>
-            <a:r>
-              <a:rPr sz="1500">
-                <a:solidFill>
-                  <a:srgbClr val="1A1A2E"/>
-                </a:solidFill>
-                <a:latin typeface="Calibri"/>
-              </a:rPr>
-              <a:t>Anche con QUALUNQUE input,</a:t>
-            </a:r>
-          </a:p>
-          <a:p>
-            <a:pPr>
-              <a:lnSpc>
-                <a:spcPct val="150000"/>
-              </a:lnSpc>
-              <a:spcAft>
-                <a:spcPts val="400"/>
-              </a:spcAft>
-            </a:pPr>
-            <a:r>
-              <a:rPr sz="1500" b="1">
-                <a:solidFill>
-                  <a:srgbClr val="06A77D"/>
-                </a:solidFill>
-                <a:latin typeface="Calibri"/>
-              </a:rPr>
-              <a:t>▸  </a:t>
-            </a:r>
-            <a:r>
-              <a:rPr sz="1500">
-                <a:solidFill>
-                  <a:srgbClr val="1A1A2E"/>
-                </a:solidFill>
-                <a:latin typeface="Calibri"/>
-              </a:rPr>
-              <a:t>non viene interpretato</a:t>
-            </a:r>
-          </a:p>
-          <a:p>
-            <a:pPr>
-              <a:lnSpc>
-                <a:spcPct val="150000"/>
-              </a:lnSpc>
-              <a:spcAft>
-                <a:spcPts val="400"/>
-              </a:spcAft>
-            </a:pPr>
-            <a:r>
-              <a:rPr sz="1500" b="1">
-                <a:solidFill>
-                  <a:srgbClr val="06A77D"/>
-                </a:solidFill>
-                <a:latin typeface="Calibri"/>
-              </a:rPr>
-              <a:t>▸  </a:t>
-            </a:r>
-            <a:r>
-              <a:rPr sz="1500">
-                <a:solidFill>
-                  <a:srgbClr val="1A1A2E"/>
-                </a:solidFill>
-                <a:latin typeface="Calibri"/>
-              </a:rPr>
-              <a:t/>
-            </a:r>
-          </a:p>
-          <a:p>
-            <a:pPr>
-              <a:lnSpc>
-                <a:spcPct val="150000"/>
-              </a:lnSpc>
-              <a:spcAft>
-                <a:spcPts val="400"/>
-              </a:spcAft>
-            </a:pPr>
-            <a:r>
-              <a:rPr sz="1500" b="1">
-                <a:solidFill>
-                  <a:srgbClr val="06A77D"/>
-                </a:solidFill>
-                <a:latin typeface="Calibri"/>
-              </a:rPr>
-              <a:t>▸  </a:t>
-            </a:r>
-            <a:r>
-              <a:rPr sz="1500">
-                <a:solidFill>
-                  <a:srgbClr val="1A1A2E"/>
-                </a:solidFill>
-                <a:latin typeface="Calibri"/>
-              </a:rPr>
-              <a:t>Whitelist &gt; Blacklist (sempre)</a:t>
+              <a:rPr sz="1300" b="0" i="1">
+                <a:solidFill>
+                  <a:srgbClr val="6B7280"/>
+                </a:solidFill>
+                <a:latin typeface="Calibri"/>
+              </a:rPr>
+              <a:t>Query parametrizzata: il driver tratta i dati come VALORI, mai come SQL</a:t>
             </a:r>
           </a:p>
         </p:txBody>
       </p:sp>
       <p:cxnSp>
         <p:nvCxnSpPr>
-          <p:cNvPr id="12" name="Connector 11"/>
+          <p:cNvPr id="6" name="Connector 5"/>
           <p:cNvCxnSpPr/>
           <p:nvPr/>
         </p:nvCxnSpPr>
@@ -9970,7 +11236,7 @@
       </p:cxnSp>
       <p:sp>
         <p:nvSpPr>
-          <p:cNvPr id="13" name="TextBox 12"/>
+          <p:cNvPr id="7" name="TextBox 6"/>
           <p:cNvSpPr txBox="1"/>
           <p:nvPr/>
         </p:nvSpPr>
@@ -10005,7 +11271,7 @@
       </p:sp>
       <p:sp>
         <p:nvSpPr>
-          <p:cNvPr id="14" name="TextBox 13"/>
+          <p:cNvPr id="8" name="TextBox 7"/>
           <p:cNvSpPr txBox="1"/>
           <p:nvPr/>
         </p:nvSpPr>
@@ -10033,7 +11299,7 @@
                 </a:solidFill>
                 <a:latin typeface="Calibri"/>
               </a:rPr>
-              <a:t>L3  ·  9/14</a:t>
+              <a:t>L3  ·  9/15</a:t>
             </a:r>
           </a:p>
         </p:txBody>
